--- a/2.7/1.pptx
+++ b/2.7/1.pptx
@@ -1,9 +1,12 @@
 
 <file path=ppt/presentation.xml><?xml version="1.0" encoding="utf-8"?>
-<p:presentation xmlns:a="http://schemas.openxmlformats.org/drawingml/2006/main" xmlns:r="http://schemas.openxmlformats.org/officeDocument/2006/relationships" xmlns:p="http://schemas.openxmlformats.org/presentationml/2006/main" saveSubsetFonts="true" autoCompressPictures="0" embedTrueTypeFonts="true">
+<p:presentation xmlns:a="http://schemas.openxmlformats.org/drawingml/2006/main" xmlns:r="http://schemas.openxmlformats.org/officeDocument/2006/relationships" xmlns:p="http://schemas.openxmlformats.org/presentationml/2006/main" embedTrueTypeFonts="1" saveSubsetFonts="1" autoCompressPictures="0">
   <p:sldMasterIdLst>
     <p:sldMasterId id="2147483648" r:id="rId1"/>
   </p:sldMasterIdLst>
+  <p:notesMasterIdLst>
+    <p:notesMasterId r:id="rId12"/>
+  </p:notesMasterIdLst>
   <p:sldIdLst>
     <p:sldId id="256" r:id="rId2"/>
     <p:sldId id="257" r:id="rId3"/>
@@ -16,23 +19,21 @@
     <p:sldId id="264" r:id="rId10"/>
     <p:sldId id="265" r:id="rId11"/>
   </p:sldIdLst>
-  <p:notesMasterIdLst>
-    <p:notesMasterId r:id="rId12"/>
-  </p:notesMasterIdLst>
-  <p:sldSz cx="12191695" cy="6858000"/>
-  <p:notesSz cx="6858000" cy="12191695"/>
+  <p:sldSz cx="12192000" cy="6858000"/>
+  <p:notesSz cx="6858000" cy="12192000"/>
   <p:embeddedFontLst>
     <p:embeddedFont>
-      <p:font typeface="Montserrat Bold"/>
-      <p:regular r:id="rId201314"/>
+      <p:font typeface="Montserrat Bold" panose="020B0604020202020204" charset="-52"/>
+      <p:regular r:id="rId13"/>
     </p:embeddedFont>
     <p:embeddedFont>
-      <p:font typeface="Open Sans Bold"/>
-      <p:regular r:id="rId201315"/>
+      <p:font typeface="Open Sans" panose="020B0606030504020204" pitchFamily="34" charset="0"/>
+      <p:regular r:id="rId14"/>
+      <p:bold r:id="rId15"/>
     </p:embeddedFont>
     <p:embeddedFont>
-      <p:font typeface="Open Sans"/>
-      <p:regular r:id="rId201316"/>
+      <p:font typeface="Open Sans Bold" panose="020B0806030504020204" charset="0"/>
+      <p:regular r:id="rId16"/>
     </p:embeddedFont>
   </p:embeddedFontLst>
   <p:defaultTextStyle>
@@ -127,6 +128,11 @@
       </a:defRPr>
     </a:lvl9pPr>
   </p:defaultTextStyle>
+  <p:extLst>
+    <p:ext uri="{EFAFB233-063F-42B5-8137-9DF3F51BA10A}">
+      <p15:sldGuideLst xmlns:p15="http://schemas.microsoft.com/office/powerpoint/2012/main"/>
+    </p:ext>
+  </p:extLst>
 </p:presentation>
 </file>
 
@@ -152,234 +158,10 @@
           <a:chExt cx="0" cy="0"/>
         </a:xfrm>
       </p:grpSpPr>
-      <p:sp>
-        <p:nvSpPr>
-          <p:cNvPr id="2" name="Header Placeholder 1"/>
-          <p:cNvSpPr>
-            <a:spLocks noGrp="1"/>
-          </p:cNvSpPr>
-          <p:nvPr>
-            <p:ph type="hdr" sz="quarter"/>
-          </p:nvPr>
-        </p:nvSpPr>
-        <p:spPr>
-          <a:xfrm>
-            <a:off x="0" y="0"/>
-            <a:ext cx="2971800" cy="458788"/>
-          </a:xfrm>
-          <a:prstGeom prst="rect">
-            <a:avLst/>
-          </a:prstGeom>
-        </p:spPr>
-        <p:txBody>
-          <a:bodyPr vert="horz" lIns="91440" tIns="45720" rIns="91440" bIns="45720" rtlCol="0"/>
-          <a:lstStyle>
-            <a:lvl1pPr algn="l">
-              <a:defRPr sz="1200"/>
-            </a:lvl1pPr>
-          </a:lstStyle>
-          <a:p>
-            <a:endParaRPr lang="en-US"/>
-          </a:p>
-        </p:txBody>
-      </p:sp>
-      <p:sp>
-        <p:nvSpPr>
-          <p:cNvPr id="3" name="Date Placeholder 2"/>
-          <p:cNvSpPr>
-            <a:spLocks noGrp="1"/>
-          </p:cNvSpPr>
-          <p:nvPr>
-            <p:ph type="dt" idx="1"/>
-          </p:nvPr>
-        </p:nvSpPr>
-        <p:spPr>
-          <a:xfrm>
-            <a:off x="3884613" y="0"/>
-            <a:ext cx="2971800" cy="458788"/>
-          </a:xfrm>
-          <a:prstGeom prst="rect">
-            <a:avLst/>
-          </a:prstGeom>
-        </p:spPr>
-        <p:txBody>
-          <a:bodyPr vert="horz" lIns="91440" tIns="45720" rIns="91440" bIns="45720" rtlCol="0"/>
-          <a:lstStyle>
-            <a:lvl1pPr algn="r">
-              <a:defRPr sz="1200"/>
-            </a:lvl1pPr>
-          </a:lstStyle>
-          <a:p>
-            <a:fld id="{5282F153-3F37-0F45-9E97-73ACFA13230C}" type="datetimeFigureOut">
-              <a:rPr lang="en-US"/>
-              <a:t>7/23/19</a:t>
-            </a:fld>
-            <a:endParaRPr lang="en-US"/>
-          </a:p>
-        </p:txBody>
-      </p:sp>
-      <p:sp>
-        <p:nvSpPr>
-          <p:cNvPr id="4" name="Slide Image Placeholder 3"/>
-          <p:cNvSpPr>
-            <a:spLocks noGrp="1" noRot="1" noChangeAspect="1"/>
-          </p:cNvSpPr>
-          <p:nvPr>
-            <p:ph type="sldImg" idx="2"/>
-          </p:nvPr>
-        </p:nvSpPr>
-        <p:spPr>
-          <a:xfrm>
-            <a:off x="685800" y="1143000"/>
-            <a:ext cx="5486400" cy="3086100"/>
-          </a:xfrm>
-          <a:prstGeom prst="rect">
-            <a:avLst/>
-          </a:prstGeom>
-          <a:noFill/>
-          <a:ln w="12700">
-            <a:solidFill>
-              <a:prstClr val="black"/>
-            </a:solidFill>
-          </a:ln>
-        </p:spPr>
-        <p:txBody>
-          <a:bodyPr vert="horz" lIns="91440" tIns="45720" rIns="91440" bIns="45720" rtlCol="0" anchor="ctr"/>
-          <a:lstStyle/>
-          <a:p>
-            <a:endParaRPr lang="en-US"/>
-          </a:p>
-        </p:txBody>
-      </p:sp>
-      <p:sp>
-        <p:nvSpPr>
-          <p:cNvPr id="5" name="Notes Placeholder 4"/>
-          <p:cNvSpPr>
-            <a:spLocks noGrp="1"/>
-          </p:cNvSpPr>
-          <p:nvPr>
-            <p:ph type="body" sz="quarter" idx="3"/>
-          </p:nvPr>
-        </p:nvSpPr>
-        <p:spPr>
-          <a:xfrm>
-            <a:off x="685800" y="4400550"/>
-            <a:ext cx="5486400" cy="3600450"/>
-          </a:xfrm>
-          <a:prstGeom prst="rect">
-            <a:avLst/>
-          </a:prstGeom>
-        </p:spPr>
-        <p:txBody>
-          <a:bodyPr vert="horz" lIns="91440" tIns="45720" rIns="91440" bIns="45720" rtlCol="0"/>
-          <a:lstStyle/>
-          <a:p>
-            <a:pPr lvl="0"/>
-            <a:r>
-              <a:rPr lang="en-US"/>
-              <a:t>Click to edit Master text styles</a:t>
-            </a:r>
-          </a:p>
-          <a:p>
-            <a:pPr lvl="1"/>
-            <a:r>
-              <a:rPr lang="en-US"/>
-              <a:t>Second level</a:t>
-            </a:r>
-          </a:p>
-          <a:p>
-            <a:pPr lvl="2"/>
-            <a:r>
-              <a:rPr lang="en-US"/>
-              <a:t>Third level</a:t>
-            </a:r>
-          </a:p>
-          <a:p>
-            <a:pPr lvl="3"/>
-            <a:r>
-              <a:rPr lang="en-US"/>
-              <a:t>Fourth level</a:t>
-            </a:r>
-          </a:p>
-          <a:p>
-            <a:pPr lvl="4"/>
-            <a:r>
-              <a:rPr lang="en-US"/>
-              <a:t>Fifth level</a:t>
-            </a:r>
-          </a:p>
-        </p:txBody>
-      </p:sp>
-      <p:sp>
-        <p:nvSpPr>
-          <p:cNvPr id="6" name="Footer Placeholder 5"/>
-          <p:cNvSpPr>
-            <a:spLocks noGrp="1"/>
-          </p:cNvSpPr>
-          <p:nvPr>
-            <p:ph type="ftr" sz="quarter" idx="4"/>
-          </p:nvPr>
-        </p:nvSpPr>
-        <p:spPr>
-          <a:xfrm>
-            <a:off x="0" y="8685213"/>
-            <a:ext cx="2971800" cy="458787"/>
-          </a:xfrm>
-          <a:prstGeom prst="rect">
-            <a:avLst/>
-          </a:prstGeom>
-        </p:spPr>
-        <p:txBody>
-          <a:bodyPr vert="horz" lIns="91440" tIns="45720" rIns="91440" bIns="45720" rtlCol="0" anchor="b"/>
-          <a:lstStyle>
-            <a:lvl1pPr algn="l">
-              <a:defRPr sz="1200"/>
-            </a:lvl1pPr>
-          </a:lstStyle>
-          <a:p>
-            <a:endParaRPr lang="en-US"/>
-          </a:p>
-        </p:txBody>
-      </p:sp>
-      <p:sp>
-        <p:nvSpPr>
-          <p:cNvPr id="7" name="Slide Number Placeholder 6"/>
-          <p:cNvSpPr>
-            <a:spLocks noGrp="1"/>
-          </p:cNvSpPr>
-          <p:nvPr>
-            <p:ph type="sldNum" sz="quarter" idx="5"/>
-          </p:nvPr>
-        </p:nvSpPr>
-        <p:spPr>
-          <a:xfrm>
-            <a:off x="3884613" y="8685213"/>
-            <a:ext cx="2971800" cy="458787"/>
-          </a:xfrm>
-          <a:prstGeom prst="rect">
-            <a:avLst/>
-          </a:prstGeom>
-        </p:spPr>
-        <p:txBody>
-          <a:bodyPr vert="horz" lIns="91440" tIns="45720" rIns="91440" bIns="45720" rtlCol="0" anchor="b"/>
-          <a:lstStyle>
-            <a:lvl1pPr algn="r">
-              <a:defRPr sz="1200"/>
-            </a:lvl1pPr>
-          </a:lstStyle>
-          <a:p>
-            <a:fld id="{CE5E9CC1-C706-0F49-92D6-E571CC5EEA8F}" type="slidenum">
-              <a:rPr lang="en-US"/>
-              <a:t>‹#›</a:t>
-            </a:fld>
-            <a:endParaRPr lang="en-US"/>
-          </a:p>
-        </p:txBody>
-      </p:sp>
     </p:spTree>
     <p:extLst>
       <p:ext uri="{BB962C8B-B14F-4D97-AF65-F5344CB8AC3E}">
-        <p14:creationId xmlns:p14="http://schemas.microsoft.com/office/powerpoint/2010/main" val="1024086991"/>
+        <p14:creationId xmlns:p14="http://schemas.microsoft.com/office/powerpoint/2010/main" val="3809019809"/>
       </p:ext>
     </p:extLst>
   </p:cSld>
@@ -523,10 +305,6 @@
           <a:bodyPr/>
           <a:lstStyle/>
           <a:p>
-            <a:r>
-              <a:rPr lang="en-US" dirty="0"/>
-              <a:t/>
-            </a:r>
             <a:endParaRPr lang="en-US" dirty="0"/>
           </a:p>
         </p:txBody>
@@ -611,10 +389,6 @@
           <a:bodyPr/>
           <a:lstStyle/>
           <a:p>
-            <a:r>
-              <a:rPr lang="en-US" dirty="0"/>
-              <a:t/>
-            </a:r>
             <a:endParaRPr lang="en-US" dirty="0"/>
           </a:p>
         </p:txBody>
@@ -699,10 +473,6 @@
           <a:bodyPr/>
           <a:lstStyle/>
           <a:p>
-            <a:r>
-              <a:rPr lang="en-US" dirty="0"/>
-              <a:t/>
-            </a:r>
             <a:endParaRPr lang="en-US" dirty="0"/>
           </a:p>
         </p:txBody>
@@ -787,10 +557,6 @@
           <a:bodyPr/>
           <a:lstStyle/>
           <a:p>
-            <a:r>
-              <a:rPr lang="en-US" dirty="0"/>
-              <a:t/>
-            </a:r>
             <a:endParaRPr lang="en-US" dirty="0"/>
           </a:p>
         </p:txBody>
@@ -875,10 +641,6 @@
           <a:bodyPr/>
           <a:lstStyle/>
           <a:p>
-            <a:r>
-              <a:rPr lang="en-US" dirty="0"/>
-              <a:t/>
-            </a:r>
             <a:endParaRPr lang="en-US" dirty="0"/>
           </a:p>
         </p:txBody>
@@ -963,10 +725,6 @@
           <a:bodyPr/>
           <a:lstStyle/>
           <a:p>
-            <a:r>
-              <a:rPr lang="en-US" dirty="0"/>
-              <a:t/>
-            </a:r>
             <a:endParaRPr lang="en-US" dirty="0"/>
           </a:p>
         </p:txBody>
@@ -1051,10 +809,6 @@
           <a:bodyPr/>
           <a:lstStyle/>
           <a:p>
-            <a:r>
-              <a:rPr lang="en-US" dirty="0"/>
-              <a:t/>
-            </a:r>
             <a:endParaRPr lang="en-US" dirty="0"/>
           </a:p>
         </p:txBody>
@@ -1139,10 +893,6 @@
           <a:bodyPr/>
           <a:lstStyle/>
           <a:p>
-            <a:r>
-              <a:rPr lang="en-US" dirty="0"/>
-              <a:t/>
-            </a:r>
             <a:endParaRPr lang="en-US" dirty="0"/>
           </a:p>
         </p:txBody>
@@ -1227,10 +977,6 @@
           <a:bodyPr/>
           <a:lstStyle/>
           <a:p>
-            <a:r>
-              <a:rPr lang="en-US" dirty="0"/>
-              <a:t/>
-            </a:r>
             <a:endParaRPr lang="en-US" dirty="0"/>
           </a:p>
         </p:txBody>
@@ -1315,10 +1061,6 @@
           <a:bodyPr/>
           <a:lstStyle/>
           <a:p>
-            <a:r>
-              <a:rPr lang="en-US" dirty="0"/>
-              <a:t/>
-            </a:r>
             <a:endParaRPr lang="en-US" dirty="0"/>
           </a:p>
         </p:txBody>
@@ -1397,6 +1139,7 @@
         <a:solidFill>
           <a:srgbClr val="000000"/>
         </a:solidFill>
+        <a:effectLst/>
       </p:bgPr>
     </p:bg>
     <p:spTree>
@@ -1453,32 +1196,6 @@
           <a:ln/>
         </p:spPr>
       </p:sp>
-      <p:pic>
-        <p:nvPicPr>
-          <p:cNvPr id="4" name="Image 0" descr="preencoded.png">
-            <a:hlinkClick r:id="rId2" tooltip=""/>
-          </p:cNvPr>
-          <p:cNvPicPr>
-            <a:picLocks noChangeAspect="1"/>
-          </p:cNvPicPr>
-          <p:nvPr/>
-        </p:nvPicPr>
-        <p:blipFill>
-          <a:blip r:embed="rId1"/>
-          <a:stretch>
-            <a:fillRect/>
-          </a:stretch>
-        </p:blipFill>
-        <p:spPr>
-          <a:xfrm>
-            <a:off x="11076875" y="6558991"/>
-            <a:ext cx="1071843" cy="256032"/>
-          </a:xfrm>
-          <a:prstGeom prst="rect">
-            <a:avLst/>
-          </a:prstGeom>
-        </p:spPr>
-      </p:pic>
     </p:spTree>
   </p:cSld>
   <p:clrMapOvr>
@@ -1490,6 +1207,11 @@
 <file path=ppt/slideMasters/slideMaster1.xml><?xml version="1.0" encoding="utf-8"?>
 <p:sldMaster xmlns:a="http://schemas.openxmlformats.org/drawingml/2006/main" xmlns:r="http://schemas.openxmlformats.org/officeDocument/2006/relationships" xmlns:p="http://schemas.openxmlformats.org/presentationml/2006/main">
   <p:cSld>
+    <p:bg>
+      <p:bgRef idx="1001">
+        <a:schemeClr val="bg1"/>
+      </p:bgRef>
+    </p:bg>
     <p:spTree>
       <p:nvGrpSpPr>
         <p:cNvPr id="1" name=""/>
@@ -1804,14 +1526,14 @@
       </p:sp>
       <p:pic>
         <p:nvPicPr>
-          <p:cNvPr id="3" name="Image 0" descr="preencoded.png">    </p:cNvPr>
+          <p:cNvPr id="3" name="Image 0" descr="preencoded.png"/>
           <p:cNvPicPr>
             <a:picLocks noChangeAspect="1"/>
           </p:cNvPicPr>
           <p:nvPr/>
         </p:nvPicPr>
         <p:blipFill>
-          <a:blip r:embed="rId1"/>
+          <a:blip r:embed="rId3"/>
           <a:stretch>
             <a:fillRect/>
           </a:stretch>
@@ -1849,7 +1571,7 @@
           </a:bodyPr>
           <a:lstStyle/>
           <a:p>
-            <a:pPr algn="l" indent="0" marL="0">
+            <a:pPr marL="0" indent="0" algn="l">
               <a:lnSpc>
                 <a:spcPct val="104000"/>
               </a:lnSpc>
@@ -1893,7 +1615,7 @@
           </a:bodyPr>
           <a:lstStyle/>
           <a:p>
-            <a:pPr algn="l" indent="0" marL="0">
+            <a:pPr marL="0" indent="0" algn="l">
               <a:lnSpc>
                 <a:spcPct val="130000"/>
               </a:lnSpc>
@@ -1910,74 +1632,62 @@
               </a:rPr>
               <a:t>Попарное тестирование — это подход, который помогает, когда поведение системы зависит одновременно от нескольких независимых условий. Вместо проверки всех возможных сочетаний мы выбираем умный набор тестов, где </a:t>
             </a:r>
-            <a:pPr algn="l" indent="0" marL="0">
+            <a:r>
+              <a:rPr lang="en-US" sz="1400" b="1" dirty="0">
+                <a:solidFill>
+                  <a:srgbClr val="000000"/>
+                </a:solidFill>
+                <a:latin typeface="Open Sans Bold" pitchFamily="34" charset="0"/>
+                <a:ea typeface="Open Sans Bold" pitchFamily="34" charset="-122"/>
+                <a:cs typeface="Open Sans Bold" pitchFamily="34" charset="-120"/>
+              </a:rPr>
+              <a:t>каждая пара значений разных параметров встречается хотя бы один раз</a:t>
+            </a:r>
+            <a:r>
+              <a:rPr lang="en-US" sz="1400" dirty="0">
+                <a:solidFill>
+                  <a:srgbClr val="000000"/>
+                </a:solidFill>
+                <a:latin typeface="Open Sans" pitchFamily="34" charset="0"/>
+                <a:ea typeface="Open Sans" pitchFamily="34" charset="-122"/>
+                <a:cs typeface="Open Sans" pitchFamily="34" charset="-120"/>
+              </a:rPr>
+              <a:t>.</a:t>
+            </a:r>
+            <a:endParaRPr lang="en-US" sz="1400" dirty="0"/>
+          </a:p>
+        </p:txBody>
+      </p:sp>
+      <p:sp>
+        <p:nvSpPr>
+          <p:cNvPr id="6" name="Text 3"/>
+          <p:cNvSpPr/>
+          <p:nvPr/>
+        </p:nvSpPr>
+        <p:spPr>
+          <a:xfrm>
+            <a:off x="8607210" y="2264073"/>
+            <a:ext cx="2929360" cy="1960662"/>
+          </a:xfrm>
+          <a:prstGeom prst="rect">
+            <a:avLst/>
+          </a:prstGeom>
+          <a:noFill/>
+          <a:ln/>
+        </p:spPr>
+        <p:txBody>
+          <a:bodyPr wrap="square" lIns="0" tIns="0" rIns="0" bIns="0" rtlCol="0" anchor="t">
+            <a:normAutofit/>
+          </a:bodyPr>
+          <a:lstStyle/>
+          <a:p>
+            <a:pPr marL="0" indent="0" algn="l">
               <a:lnSpc>
                 <a:spcPct val="130000"/>
               </a:lnSpc>
               <a:buNone/>
             </a:pPr>
             <a:r>
-              <a:rPr lang="en-US" sz="1400" b="1" dirty="0">
-                <a:solidFill>
-                  <a:srgbClr val="000000"/>
-                </a:solidFill>
-                <a:latin typeface="Open Sans Bold" pitchFamily="34" charset="0"/>
-                <a:ea typeface="Open Sans Bold" pitchFamily="34" charset="-122"/>
-                <a:cs typeface="Open Sans Bold" pitchFamily="34" charset="-120"/>
-              </a:rPr>
-              <a:t>каждая пара значений разных параметров встречается хотя бы один раз</a:t>
-            </a:r>
-            <a:pPr algn="l" indent="0" marL="0">
-              <a:lnSpc>
-                <a:spcPct val="130000"/>
-              </a:lnSpc>
-              <a:buNone/>
-            </a:pPr>
-            <a:r>
-              <a:rPr lang="en-US" sz="1400" dirty="0">
-                <a:solidFill>
-                  <a:srgbClr val="000000"/>
-                </a:solidFill>
-                <a:latin typeface="Open Sans" pitchFamily="34" charset="0"/>
-                <a:ea typeface="Open Sans" pitchFamily="34" charset="-122"/>
-                <a:cs typeface="Open Sans" pitchFamily="34" charset="-120"/>
-              </a:rPr>
-              <a:t>.</a:t>
-            </a:r>
-            <a:endParaRPr lang="en-US" sz="1400" dirty="0"/>
-          </a:p>
-        </p:txBody>
-      </p:sp>
-      <p:sp>
-        <p:nvSpPr>
-          <p:cNvPr id="6" name="Text 3"/>
-          <p:cNvSpPr/>
-          <p:nvPr/>
-        </p:nvSpPr>
-        <p:spPr>
-          <a:xfrm>
-            <a:off x="8607210" y="2264073"/>
-            <a:ext cx="2929360" cy="1960662"/>
-          </a:xfrm>
-          <a:prstGeom prst="rect">
-            <a:avLst/>
-          </a:prstGeom>
-          <a:noFill/>
-          <a:ln/>
-        </p:spPr>
-        <p:txBody>
-          <a:bodyPr wrap="square" lIns="0" tIns="0" rIns="0" bIns="0" rtlCol="0" anchor="t">
-            <a:normAutofit/>
-          </a:bodyPr>
-          <a:lstStyle/>
-          <a:p>
-            <a:pPr algn="l" indent="0" marL="0">
-              <a:lnSpc>
-                <a:spcPct val="130000"/>
-              </a:lnSpc>
-              <a:buNone/>
-            </a:pPr>
-            <a:r>
               <a:rPr lang="en-US" sz="1400" dirty="0">
                 <a:solidFill>
                   <a:srgbClr val="000000"/>
@@ -2016,14 +1726,14 @@
       </p:sp>
       <p:pic>
         <p:nvPicPr>
-          <p:cNvPr id="8" name="Image 1" descr="preencoded.png">    </p:cNvPr>
+          <p:cNvPr id="8" name="Image 1" descr="preencoded.png"/>
           <p:cNvPicPr>
             <a:picLocks noChangeAspect="1"/>
           </p:cNvPicPr>
           <p:nvPr/>
         </p:nvPicPr>
         <p:blipFill>
-          <a:blip r:embed="rId2"/>
+          <a:blip r:embed="rId4"/>
           <a:stretch>
             <a:fillRect/>
           </a:stretch>
@@ -2061,7 +1771,7 @@
           </a:bodyPr>
           <a:lstStyle/>
           <a:p>
-            <a:pPr algn="l" indent="0" marL="0">
+            <a:pPr marL="0" indent="0" algn="l">
               <a:lnSpc>
                 <a:spcPct val="130000"/>
               </a:lnSpc>
@@ -2128,7 +1838,7 @@
           <a:bodyPr wrap="none" lIns="0" tIns="0" rIns="0" bIns="0" rtlCol="0" anchor="t"/>
           <a:lstStyle/>
           <a:p>
-            <a:pPr algn="l" indent="0" marL="0">
+            <a:pPr marL="0" indent="0" algn="l">
               <a:lnSpc>
                 <a:spcPct val="104000"/>
               </a:lnSpc>
@@ -2151,14 +1861,14 @@
       </p:sp>
       <p:pic>
         <p:nvPicPr>
-          <p:cNvPr id="3" name="Image 0" descr="preencoded.png">    </p:cNvPr>
+          <p:cNvPr id="3" name="Image 0" descr="preencoded.png"/>
           <p:cNvPicPr>
             <a:picLocks noChangeAspect="1"/>
           </p:cNvPicPr>
           <p:nvPr/>
         </p:nvPicPr>
         <p:blipFill>
-          <a:blip r:embed="rId1"/>
+          <a:blip r:embed="rId3"/>
           <a:stretch>
             <a:fillRect/>
           </a:stretch>
@@ -2196,7 +1906,7 @@
           </a:bodyPr>
           <a:lstStyle/>
           <a:p>
-            <a:pPr algn="ctr" indent="0" marL="0">
+            <a:pPr marL="0" indent="0" algn="ctr">
               <a:lnSpc>
                 <a:spcPct val="104000"/>
               </a:lnSpc>
@@ -2240,7 +1950,7 @@
           </a:bodyPr>
           <a:lstStyle/>
           <a:p>
-            <a:pPr algn="ctr" indent="0" marL="0">
+            <a:pPr marL="0" indent="0" algn="ctr">
               <a:lnSpc>
                 <a:spcPct val="104000"/>
               </a:lnSpc>
@@ -2284,7 +1994,7 @@
           </a:bodyPr>
           <a:lstStyle/>
           <a:p>
-            <a:pPr algn="ctr" indent="0" marL="0">
+            <a:pPr marL="0" indent="0" algn="ctr">
               <a:lnSpc>
                 <a:spcPct val="104000"/>
               </a:lnSpc>
@@ -2328,7 +2038,7 @@
           </a:bodyPr>
           <a:lstStyle/>
           <a:p>
-            <a:pPr algn="ctr" indent="0" marL="0">
+            <a:pPr marL="0" indent="0" algn="ctr">
               <a:lnSpc>
                 <a:spcPct val="104000"/>
               </a:lnSpc>
@@ -2372,7 +2082,7 @@
           </a:bodyPr>
           <a:lstStyle/>
           <a:p>
-            <a:pPr algn="ctr" indent="0" marL="0">
+            <a:pPr marL="0" indent="0" algn="ctr">
               <a:lnSpc>
                 <a:spcPct val="104000"/>
               </a:lnSpc>
@@ -2416,7 +2126,7 @@
           </a:bodyPr>
           <a:lstStyle/>
           <a:p>
-            <a:pPr algn="l" indent="0" marL="0">
+            <a:pPr marL="0" indent="0" algn="l">
               <a:lnSpc>
                 <a:spcPct val="133000"/>
               </a:lnSpc>
@@ -2433,12 +2143,6 @@
               </a:rPr>
               <a:t>Главная ценность — </a:t>
             </a:r>
-            <a:pPr algn="l" indent="0" marL="0">
-              <a:lnSpc>
-                <a:spcPct val="133000"/>
-              </a:lnSpc>
-              <a:buNone/>
-            </a:pPr>
             <a:r>
               <a:rPr lang="en-US" sz="1450" b="1" dirty="0">
                 <a:solidFill>
@@ -2450,12 +2154,6 @@
               </a:rPr>
               <a:t>контролируемое сокращение комбинаций</a:t>
             </a:r>
-            <a:pPr algn="l" indent="0" marL="0">
-              <a:lnSpc>
-                <a:spcPct val="133000"/>
-              </a:lnSpc>
-              <a:buNone/>
-            </a:pPr>
             <a:r>
               <a:rPr lang="en-US" sz="1450" dirty="0">
                 <a:solidFill>
@@ -2473,17 +2171,17 @@
       </p:sp>
       <p:pic>
         <p:nvPicPr>
-          <p:cNvPr id="10" name="Image 1" descr="preencoded.png">    </p:cNvPr>
+          <p:cNvPr id="10" name="Image 1" descr="preencoded.png"/>
           <p:cNvPicPr>
             <a:picLocks noChangeAspect="1"/>
           </p:cNvPicPr>
           <p:nvPr/>
         </p:nvPicPr>
         <p:blipFill>
-          <a:blip r:embed="rId2">
+          <a:blip>
             <a:extLst>
               <a:ext uri="{96DAC541-7B7A-43D3-8B79-37D633B846F1}">
-                <asvg:svgBlip xmlns:asvg="http://schemas.microsoft.com/office/drawing/2016/SVG/main" r:embed="rId3"/>
+                <asvg:svgBlip xmlns:asvg="http://schemas.microsoft.com/office/drawing/2016/SVG/main" r:embed="rId4"/>
               </a:ext>
             </a:extLst>
           </a:blip>
@@ -2522,7 +2220,7 @@
           <a:bodyPr wrap="none" lIns="0" tIns="0" rIns="0" bIns="0" rtlCol="0" anchor="t"/>
           <a:lstStyle/>
           <a:p>
-            <a:pPr algn="l" indent="0" marL="0">
+            <a:pPr marL="0" indent="0" algn="l">
               <a:lnSpc>
                 <a:spcPct val="104000"/>
               </a:lnSpc>
@@ -2566,7 +2264,7 @@
           </a:bodyPr>
           <a:lstStyle/>
           <a:p>
-            <a:pPr algn="l" indent="0" marL="0">
+            <a:pPr marL="0" indent="0" algn="l">
               <a:lnSpc>
                 <a:spcPct val="133000"/>
               </a:lnSpc>
@@ -2589,17 +2287,17 @@
       </p:sp>
       <p:pic>
         <p:nvPicPr>
-          <p:cNvPr id="13" name="Image 2" descr="preencoded.png">    </p:cNvPr>
+          <p:cNvPr id="13" name="Image 2" descr="preencoded.png"/>
           <p:cNvPicPr>
             <a:picLocks noChangeAspect="1"/>
           </p:cNvPicPr>
           <p:nvPr/>
         </p:nvPicPr>
         <p:blipFill>
-          <a:blip r:embed="rId4">
+          <a:blip>
             <a:extLst>
               <a:ext uri="{96DAC541-7B7A-43D3-8B79-37D633B846F1}">
-                <asvg:svgBlip xmlns:asvg="http://schemas.microsoft.com/office/drawing/2016/SVG/main" r:embed="rId5"/>
+                <asvg:svgBlip xmlns:asvg="http://schemas.microsoft.com/office/drawing/2016/SVG/main" r:embed="rId4"/>
               </a:ext>
             </a:extLst>
           </a:blip>
@@ -2638,7 +2336,7 @@
           <a:bodyPr wrap="none" lIns="0" tIns="0" rIns="0" bIns="0" rtlCol="0" anchor="t"/>
           <a:lstStyle/>
           <a:p>
-            <a:pPr algn="l" indent="0" marL="0">
+            <a:pPr marL="0" indent="0" algn="l">
               <a:lnSpc>
                 <a:spcPct val="104000"/>
               </a:lnSpc>
@@ -2682,7 +2380,7 @@
           </a:bodyPr>
           <a:lstStyle/>
           <a:p>
-            <a:pPr algn="l" indent="0" marL="0">
+            <a:pPr marL="0" indent="0" algn="l">
               <a:lnSpc>
                 <a:spcPct val="133000"/>
               </a:lnSpc>
@@ -2705,17 +2403,17 @@
       </p:sp>
       <p:pic>
         <p:nvPicPr>
-          <p:cNvPr id="16" name="Image 3" descr="preencoded.png">    </p:cNvPr>
+          <p:cNvPr id="16" name="Image 3" descr="preencoded.png"/>
           <p:cNvPicPr>
             <a:picLocks noChangeAspect="1"/>
           </p:cNvPicPr>
           <p:nvPr/>
         </p:nvPicPr>
         <p:blipFill>
-          <a:blip r:embed="rId6">
+          <a:blip>
             <a:extLst>
               <a:ext uri="{96DAC541-7B7A-43D3-8B79-37D633B846F1}">
-                <asvg:svgBlip xmlns:asvg="http://schemas.microsoft.com/office/drawing/2016/SVG/main" r:embed="rId7"/>
+                <asvg:svgBlip xmlns:asvg="http://schemas.microsoft.com/office/drawing/2016/SVG/main" r:embed="rId4"/>
               </a:ext>
             </a:extLst>
           </a:blip>
@@ -2754,7 +2452,7 @@
           <a:bodyPr wrap="none" lIns="0" tIns="0" rIns="0" bIns="0" rtlCol="0" anchor="t"/>
           <a:lstStyle/>
           <a:p>
-            <a:pPr algn="l" indent="0" marL="0">
+            <a:pPr marL="0" indent="0" algn="l">
               <a:lnSpc>
                 <a:spcPct val="104000"/>
               </a:lnSpc>
@@ -2798,7 +2496,7 @@
           </a:bodyPr>
           <a:lstStyle/>
           <a:p>
-            <a:pPr algn="l" indent="0" marL="0">
+            <a:pPr marL="0" indent="0" algn="l">
               <a:lnSpc>
                 <a:spcPct val="133000"/>
               </a:lnSpc>
@@ -2867,7 +2565,7 @@
           </a:bodyPr>
           <a:lstStyle/>
           <a:p>
-            <a:pPr algn="l" indent="0" marL="0">
+            <a:pPr marL="0" indent="0" algn="l">
               <a:lnSpc>
                 <a:spcPct val="104000"/>
               </a:lnSpc>
@@ -2890,14 +2588,14 @@
       </p:sp>
       <p:pic>
         <p:nvPicPr>
-          <p:cNvPr id="3" name="Image 0" descr="preencoded.png">    </p:cNvPr>
+          <p:cNvPr id="3" name="Image 0" descr="preencoded.png"/>
           <p:cNvPicPr>
             <a:picLocks noChangeAspect="1"/>
           </p:cNvPicPr>
           <p:nvPr/>
         </p:nvPicPr>
         <p:blipFill>
-          <a:blip r:embed="rId1"/>
+          <a:blip r:embed="rId3"/>
           <a:stretch>
             <a:fillRect/>
           </a:stretch>
@@ -2935,7 +2633,7 @@
           </a:bodyPr>
           <a:lstStyle/>
           <a:p>
-            <a:pPr algn="l" indent="0" marL="0">
+            <a:pPr marL="0" indent="0" algn="l">
               <a:lnSpc>
                 <a:spcPct val="133000"/>
               </a:lnSpc>
@@ -2955,7 +2653,32 @@
               </a:rPr>
               <a:t>Когда параметров мало, проверить все комбинации просто. Но с каждым новым параметром количество вариантов </a:t>
             </a:r>
-            <a:pPr algn="l" indent="0" marL="0">
+            <a:r>
+              <a:rPr lang="en-US" sz="1450" b="1" dirty="0">
+                <a:solidFill>
+                  <a:srgbClr val="000000"/>
+                </a:solidFill>
+                <a:latin typeface="Open Sans Bold" pitchFamily="34" charset="0"/>
+                <a:ea typeface="Open Sans Bold" pitchFamily="34" charset="-122"/>
+                <a:cs typeface="Open Sans Bold" pitchFamily="34" charset="-120"/>
+              </a:rPr>
+              <a:t>растёт экспоненциально</a:t>
+            </a:r>
+            <a:r>
+              <a:rPr lang="en-US" sz="1450" dirty="0">
+                <a:solidFill>
+                  <a:srgbClr val="000000"/>
+                </a:solidFill>
+                <a:latin typeface="Open Sans" pitchFamily="34" charset="0"/>
+                <a:ea typeface="Open Sans" pitchFamily="34" charset="-122"/>
+                <a:cs typeface="Open Sans" pitchFamily="34" charset="-120"/>
+              </a:rPr>
+              <a:t>.</a:t>
+            </a:r>
+            <a:endParaRPr lang="en-US" sz="1450" dirty="0"/>
+          </a:p>
+          <a:p>
+            <a:pPr marL="0" indent="0" algn="l">
               <a:lnSpc>
                 <a:spcPct val="133000"/>
               </a:lnSpc>
@@ -2965,26 +2688,6 @@
               <a:buNone/>
             </a:pPr>
             <a:r>
-              <a:rPr lang="en-US" sz="1450" b="1" dirty="0">
-                <a:solidFill>
-                  <a:srgbClr val="000000"/>
-                </a:solidFill>
-                <a:latin typeface="Open Sans Bold" pitchFamily="34" charset="0"/>
-                <a:ea typeface="Open Sans Bold" pitchFamily="34" charset="-122"/>
-                <a:cs typeface="Open Sans Bold" pitchFamily="34" charset="-120"/>
-              </a:rPr>
-              <a:t>растёт экспоненциально</a:t>
-            </a:r>
-            <a:pPr algn="l" indent="0" marL="0">
-              <a:lnSpc>
-                <a:spcPct val="133000"/>
-              </a:lnSpc>
-              <a:spcAft>
-                <a:spcPts val="1300"/>
-              </a:spcAft>
-              <a:buNone/>
-            </a:pPr>
-            <a:r>
               <a:rPr lang="en-US" sz="1450" dirty="0">
                 <a:solidFill>
                   <a:srgbClr val="000000"/>
@@ -2993,35 +2696,12 @@
                 <a:ea typeface="Open Sans" pitchFamily="34" charset="-122"/>
                 <a:cs typeface="Open Sans" pitchFamily="34" charset="-120"/>
               </a:rPr>
-              <a:t>.</a:t>
+              <a:t>Форма заказа с пятью параметрами — способ оплаты, доставка, тип клиента, устройство, язык — может дать сотни комбинаций.</a:t>
             </a:r>
             <a:endParaRPr lang="en-US" sz="1450" dirty="0"/>
           </a:p>
           <a:p>
-            <a:pPr algn="l" indent="0" marL="0">
-              <a:lnSpc>
-                <a:spcPct val="133000"/>
-              </a:lnSpc>
-              <a:spcAft>
-                <a:spcPts val="1300"/>
-              </a:spcAft>
-              <a:buNone/>
-            </a:pPr>
-            <a:r>
-              <a:rPr lang="en-US" sz="1450" dirty="0">
-                <a:solidFill>
-                  <a:srgbClr val="000000"/>
-                </a:solidFill>
-                <a:latin typeface="Open Sans" pitchFamily="34" charset="0"/>
-                <a:ea typeface="Open Sans" pitchFamily="34" charset="-122"/>
-                <a:cs typeface="Open Sans" pitchFamily="34" charset="-120"/>
-              </a:rPr>
-              <a:t>Форма заказа с пятью параметрами — способ оплаты, доставка, тип клиента, устройство, язык — может дать сотни комбинаций.</a:t>
-            </a:r>
-            <a:endParaRPr lang="en-US" sz="1450" dirty="0"/>
-          </a:p>
-          <a:p>
-            <a:pPr algn="l" indent="0" marL="0">
+            <a:pPr marL="0" indent="0" algn="l">
               <a:lnSpc>
                 <a:spcPct val="133000"/>
               </a:lnSpc>
@@ -3038,12 +2718,6 @@
               </a:rPr>
               <a:t>Проблема не только во времени выполнения: нужно создавать, поддерживать и анализировать все эти тесты. Поэтому требуется способ </a:t>
             </a:r>
-            <a:pPr algn="l" indent="0" marL="0">
-              <a:lnSpc>
-                <a:spcPct val="133000"/>
-              </a:lnSpc>
-              <a:buNone/>
-            </a:pPr>
             <a:r>
               <a:rPr lang="en-US" sz="1450" b="1" dirty="0">
                 <a:solidFill>
@@ -3055,12 +2729,6 @@
               </a:rPr>
               <a:t>сократить количество проверок без потери качества</a:t>
             </a:r>
-            <a:pPr algn="l" indent="0" marL="0">
-              <a:lnSpc>
-                <a:spcPct val="133000"/>
-              </a:lnSpc>
-              <a:buNone/>
-            </a:pPr>
             <a:r>
               <a:rPr lang="en-US" sz="1450" dirty="0">
                 <a:solidFill>
@@ -3123,14 +2791,14 @@
       </p:sp>
       <p:pic>
         <p:nvPicPr>
-          <p:cNvPr id="3" name="Image 0" descr="preencoded.png">    </p:cNvPr>
+          <p:cNvPr id="3" name="Image 0" descr="preencoded.png"/>
           <p:cNvPicPr>
             <a:picLocks noChangeAspect="1"/>
           </p:cNvPicPr>
           <p:nvPr/>
         </p:nvPicPr>
         <p:blipFill>
-          <a:blip r:embed="rId1"/>
+          <a:blip r:embed="rId3"/>
           <a:stretch>
             <a:fillRect/>
           </a:stretch>
@@ -3168,7 +2836,7 @@
           </a:bodyPr>
           <a:lstStyle/>
           <a:p>
-            <a:pPr algn="l" indent="0" marL="0">
+            <a:pPr marL="0" indent="0" algn="l">
               <a:lnSpc>
                 <a:spcPct val="104000"/>
               </a:lnSpc>
@@ -3239,7 +2907,7 @@
           </a:bodyPr>
           <a:lstStyle/>
           <a:p>
-            <a:pPr algn="l" indent="0" marL="0">
+            <a:pPr marL="0" indent="0" algn="l">
               <a:lnSpc>
                 <a:spcPct val="104000"/>
               </a:lnSpc>
@@ -3283,7 +2951,7 @@
           </a:bodyPr>
           <a:lstStyle/>
           <a:p>
-            <a:pPr algn="l" indent="0" marL="0">
+            <a:pPr marL="0" indent="0" algn="l">
               <a:lnSpc>
                 <a:spcPct val="130000"/>
               </a:lnSpc>
@@ -3300,12 +2968,6 @@
               </a:rPr>
               <a:t>Исследования показывают, что большинство дефектов, связанных с комбинациями, проявляются при взаимодействии </a:t>
             </a:r>
-            <a:pPr algn="l" indent="0" marL="0">
-              <a:lnSpc>
-                <a:spcPct val="130000"/>
-              </a:lnSpc>
-              <a:buNone/>
-            </a:pPr>
             <a:r>
               <a:rPr lang="en-US" sz="1400" b="1" dirty="0">
                 <a:solidFill>
@@ -3317,12 +2979,6 @@
               </a:rPr>
               <a:t>двух параметров</a:t>
             </a:r>
-            <a:pPr algn="l" indent="0" marL="0">
-              <a:lnSpc>
-                <a:spcPct val="130000"/>
-              </a:lnSpc>
-              <a:buNone/>
-            </a:pPr>
             <a:r>
               <a:rPr lang="en-US" sz="1400" dirty="0">
                 <a:solidFill>
@@ -3386,7 +3042,7 @@
           <a:bodyPr wrap="none" lIns="0" tIns="0" rIns="0" bIns="0" rtlCol="0" anchor="t"/>
           <a:lstStyle/>
           <a:p>
-            <a:pPr algn="l" indent="0" marL="0">
+            <a:pPr marL="0" indent="0" algn="l">
               <a:lnSpc>
                 <a:spcPct val="104000"/>
               </a:lnSpc>
@@ -3430,7 +3086,7 @@
           </a:bodyPr>
           <a:lstStyle/>
           <a:p>
-            <a:pPr algn="l" indent="0" marL="0">
+            <a:pPr marL="0" indent="0" algn="l">
               <a:lnSpc>
                 <a:spcPct val="130000"/>
               </a:lnSpc>
@@ -3499,7 +3155,7 @@
           <a:bodyPr wrap="none" lIns="0" tIns="0" rIns="0" bIns="0" rtlCol="0" anchor="t"/>
           <a:lstStyle/>
           <a:p>
-            <a:pPr algn="l" indent="0" marL="0">
+            <a:pPr marL="0" indent="0" algn="l">
               <a:lnSpc>
                 <a:spcPct val="104000"/>
               </a:lnSpc>
@@ -3543,7 +3199,7 @@
           </a:bodyPr>
           <a:lstStyle/>
           <a:p>
-            <a:pPr algn="l" indent="0" marL="0">
+            <a:pPr marL="0" indent="0" algn="l">
               <a:lnSpc>
                 <a:spcPct val="130000"/>
               </a:lnSpc>
@@ -3610,7 +3266,7 @@
           <a:bodyPr wrap="none" lIns="0" tIns="0" rIns="0" bIns="0" rtlCol="0" anchor="t"/>
           <a:lstStyle/>
           <a:p>
-            <a:pPr algn="l" indent="0" marL="0">
+            <a:pPr marL="0" indent="0" algn="l">
               <a:lnSpc>
                 <a:spcPct val="104000"/>
               </a:lnSpc>
@@ -3654,7 +3310,7 @@
           </a:bodyPr>
           <a:lstStyle/>
           <a:p>
-            <a:pPr algn="l" indent="0" marL="0">
+            <a:pPr marL="0" indent="0" algn="l">
               <a:lnSpc>
                 <a:spcPct val="116000"/>
               </a:lnSpc>
@@ -3671,7 +3327,137 @@
               </a:rPr>
               <a:t>Параметр</a:t>
             </a:r>
-            <a:pPr algn="l" indent="0" marL="0">
+            <a:r>
+              <a:rPr lang="en-US" sz="1050" dirty="0">
+                <a:solidFill>
+                  <a:srgbClr val="000000"/>
+                </a:solidFill>
+                <a:latin typeface="Open Sans" pitchFamily="34" charset="0"/>
+                <a:ea typeface="Open Sans" pitchFamily="34" charset="-122"/>
+                <a:cs typeface="Open Sans" pitchFamily="34" charset="-120"/>
+              </a:rPr>
+              <a:t> — это характеристика, которая может меняться и влиять на результат. </a:t>
+            </a:r>
+            <a:r>
+              <a:rPr lang="en-US" sz="1050" b="1" dirty="0">
+                <a:solidFill>
+                  <a:srgbClr val="000000"/>
+                </a:solidFill>
+                <a:latin typeface="Open Sans Bold" pitchFamily="34" charset="0"/>
+                <a:ea typeface="Open Sans Bold" pitchFamily="34" charset="-122"/>
+                <a:cs typeface="Open Sans Bold" pitchFamily="34" charset="-120"/>
+              </a:rPr>
+              <a:t>Значение</a:t>
+            </a:r>
+            <a:r>
+              <a:rPr lang="en-US" sz="1050" dirty="0">
+                <a:solidFill>
+                  <a:srgbClr val="000000"/>
+                </a:solidFill>
+                <a:latin typeface="Open Sans" pitchFamily="34" charset="0"/>
+                <a:ea typeface="Open Sans" pitchFamily="34" charset="-122"/>
+                <a:cs typeface="Open Sans" pitchFamily="34" charset="-120"/>
+              </a:rPr>
+              <a:t> — конкретный вариант этой характеристики.</a:t>
+            </a:r>
+            <a:endParaRPr lang="en-US" sz="1050" dirty="0"/>
+          </a:p>
+        </p:txBody>
+      </p:sp>
+      <p:pic>
+        <p:nvPicPr>
+          <p:cNvPr id="4" name="Image 0" descr="preencoded.png"/>
+          <p:cNvPicPr>
+            <a:picLocks noChangeAspect="1"/>
+          </p:cNvPicPr>
+          <p:nvPr/>
+        </p:nvPicPr>
+        <p:blipFill>
+          <a:blip r:embed="rId3"/>
+          <a:stretch>
+            <a:fillRect/>
+          </a:stretch>
+        </p:blipFill>
+        <p:spPr>
+          <a:xfrm>
+            <a:off x="8401534" y="1256605"/>
+            <a:ext cx="2687074" cy="2687141"/>
+          </a:xfrm>
+          <a:prstGeom prst="rect">
+            <a:avLst/>
+          </a:prstGeom>
+        </p:spPr>
+      </p:pic>
+      <p:sp>
+        <p:nvSpPr>
+          <p:cNvPr id="5" name="Shape 2"/>
+          <p:cNvSpPr/>
+          <p:nvPr/>
+        </p:nvSpPr>
+        <p:spPr>
+          <a:xfrm>
+            <a:off x="7953672" y="4059634"/>
+            <a:ext cx="3582799" cy="1225352"/>
+          </a:xfrm>
+          <a:prstGeom prst="roundRect">
+            <a:avLst>
+              <a:gd name="adj" fmla="val 4783"/>
+            </a:avLst>
+          </a:prstGeom>
+          <a:solidFill>
+            <a:srgbClr val="FCF2B5"/>
+          </a:solidFill>
+          <a:ln/>
+        </p:spPr>
+      </p:sp>
+      <p:pic>
+        <p:nvPicPr>
+          <p:cNvPr id="6" name="Image 1" descr="preencoded.png"/>
+          <p:cNvPicPr>
+            <a:picLocks noChangeAspect="1"/>
+          </p:cNvPicPr>
+          <p:nvPr/>
+        </p:nvPicPr>
+        <p:blipFill>
+          <a:blip r:embed="rId4"/>
+          <a:stretch>
+            <a:fillRect/>
+          </a:stretch>
+        </p:blipFill>
+        <p:spPr>
+          <a:xfrm>
+            <a:off x="8093170" y="4221361"/>
+            <a:ext cx="174422" cy="139502"/>
+          </a:xfrm>
+          <a:prstGeom prst="rect">
+            <a:avLst/>
+          </a:prstGeom>
+        </p:spPr>
+      </p:pic>
+      <p:sp>
+        <p:nvSpPr>
+          <p:cNvPr id="7" name="Text 3"/>
+          <p:cNvSpPr/>
+          <p:nvPr/>
+        </p:nvSpPr>
+        <p:spPr>
+          <a:xfrm>
+            <a:off x="8407090" y="4187130"/>
+            <a:ext cx="2989882" cy="970359"/>
+          </a:xfrm>
+          <a:prstGeom prst="rect">
+            <a:avLst/>
+          </a:prstGeom>
+          <a:noFill/>
+          <a:ln/>
+        </p:spPr>
+        <p:txBody>
+          <a:bodyPr wrap="square" lIns="0" tIns="0" rIns="0" bIns="0" rtlCol="0" anchor="t">
+            <a:normAutofit/>
+          </a:bodyPr>
+          <a:lstStyle/>
+          <a:p>
+            <a:pPr marL="0" indent="0" algn="l">
               <a:lnSpc>
                 <a:spcPct val="116000"/>
               </a:lnSpc>
@@ -3686,41 +3472,7 @@
                 <a:ea typeface="Open Sans" pitchFamily="34" charset="-122"/>
                 <a:cs typeface="Open Sans" pitchFamily="34" charset="-120"/>
               </a:rPr>
-              <a:t> — это характеристика, которая может меняться и влиять на результат. </a:t>
-            </a:r>
-            <a:pPr algn="l" indent="0" marL="0">
-              <a:lnSpc>
-                <a:spcPct val="116000"/>
-              </a:lnSpc>
-              <a:buNone/>
-            </a:pPr>
-            <a:r>
-              <a:rPr lang="en-US" sz="1050" b="1" dirty="0">
-                <a:solidFill>
-                  <a:srgbClr val="000000"/>
-                </a:solidFill>
-                <a:latin typeface="Open Sans Bold" pitchFamily="34" charset="0"/>
-                <a:ea typeface="Open Sans Bold" pitchFamily="34" charset="-122"/>
-                <a:cs typeface="Open Sans Bold" pitchFamily="34" charset="-120"/>
-              </a:rPr>
-              <a:t>Значение</a:t>
-            </a:r>
-            <a:pPr algn="l" indent="0" marL="0">
-              <a:lnSpc>
-                <a:spcPct val="116000"/>
-              </a:lnSpc>
-              <a:buNone/>
-            </a:pPr>
-            <a:r>
-              <a:rPr lang="en-US" sz="1050" dirty="0">
-                <a:solidFill>
-                  <a:srgbClr val="000000"/>
-                </a:solidFill>
-                <a:latin typeface="Open Sans" pitchFamily="34" charset="0"/>
-                <a:ea typeface="Open Sans" pitchFamily="34" charset="-122"/>
-                <a:cs typeface="Open Sans" pitchFamily="34" charset="-120"/>
-              </a:rPr>
-              <a:t> — конкретный вариант этой характеристики.</a:t>
+              <a:t>Ошибка на этом этапе приводит к бесполезному набору тестов. Важно определить, какие характеристики действительно независимы и влияют на поведение.</a:t>
             </a:r>
             <a:endParaRPr lang="en-US" sz="1050" dirty="0"/>
           </a:p>
@@ -3728,131 +3480,17 @@
       </p:sp>
       <p:pic>
         <p:nvPicPr>
-          <p:cNvPr id="4" name="Image 0" descr="preencoded.png">    </p:cNvPr>
+          <p:cNvPr id="8" name="Image 2" descr="preencoded.png"/>
           <p:cNvPicPr>
             <a:picLocks noChangeAspect="1"/>
           </p:cNvPicPr>
           <p:nvPr/>
         </p:nvPicPr>
         <p:blipFill>
-          <a:blip r:embed="rId1"/>
-          <a:stretch>
-            <a:fillRect/>
-          </a:stretch>
-        </p:blipFill>
-        <p:spPr>
-          <a:xfrm>
-            <a:off x="8401534" y="1256605"/>
-            <a:ext cx="2687074" cy="2687141"/>
-          </a:xfrm>
-          <a:prstGeom prst="rect">
-            <a:avLst/>
-          </a:prstGeom>
-        </p:spPr>
-      </p:pic>
-      <p:sp>
-        <p:nvSpPr>
-          <p:cNvPr id="5" name="Shape 2"/>
-          <p:cNvSpPr/>
-          <p:nvPr/>
-        </p:nvSpPr>
-        <p:spPr>
-          <a:xfrm>
-            <a:off x="7953672" y="4059634"/>
-            <a:ext cx="3582799" cy="1225352"/>
-          </a:xfrm>
-          <a:prstGeom prst="roundRect">
-            <a:avLst>
-              <a:gd name="adj" fmla="val 4783"/>
-            </a:avLst>
-          </a:prstGeom>
-          <a:solidFill>
-            <a:srgbClr val="FCF2B5"/>
-          </a:solidFill>
-          <a:ln/>
-        </p:spPr>
-      </p:sp>
-      <p:pic>
-        <p:nvPicPr>
-          <p:cNvPr id="6" name="Image 1" descr="preencoded.png">    </p:cNvPr>
-          <p:cNvPicPr>
-            <a:picLocks noChangeAspect="1"/>
-          </p:cNvPicPr>
-          <p:nvPr/>
-        </p:nvPicPr>
-        <p:blipFill>
-          <a:blip r:embed="rId2"/>
-          <a:stretch>
-            <a:fillRect/>
-          </a:stretch>
-        </p:blipFill>
-        <p:spPr>
-          <a:xfrm>
-            <a:off x="8093170" y="4221361"/>
-            <a:ext cx="174422" cy="139502"/>
-          </a:xfrm>
-          <a:prstGeom prst="rect">
-            <a:avLst/>
-          </a:prstGeom>
-        </p:spPr>
-      </p:pic>
-      <p:sp>
-        <p:nvSpPr>
-          <p:cNvPr id="7" name="Text 3"/>
-          <p:cNvSpPr/>
-          <p:nvPr/>
-        </p:nvSpPr>
-        <p:spPr>
-          <a:xfrm>
-            <a:off x="8407090" y="4187130"/>
-            <a:ext cx="2989882" cy="970359"/>
-          </a:xfrm>
-          <a:prstGeom prst="rect">
-            <a:avLst/>
-          </a:prstGeom>
-          <a:noFill/>
-          <a:ln/>
-        </p:spPr>
-        <p:txBody>
-          <a:bodyPr wrap="square" lIns="0" tIns="0" rIns="0" bIns="0" rtlCol="0" anchor="t">
-            <a:normAutofit/>
-          </a:bodyPr>
-          <a:lstStyle/>
-          <a:p>
-            <a:pPr algn="l" indent="0" marL="0">
-              <a:lnSpc>
-                <a:spcPct val="116000"/>
-              </a:lnSpc>
-              <a:buNone/>
-            </a:pPr>
-            <a:r>
-              <a:rPr lang="en-US" sz="1050" dirty="0">
-                <a:solidFill>
-                  <a:srgbClr val="000000"/>
-                </a:solidFill>
-                <a:latin typeface="Open Sans" pitchFamily="34" charset="0"/>
-                <a:ea typeface="Open Sans" pitchFamily="34" charset="-122"/>
-                <a:cs typeface="Open Sans" pitchFamily="34" charset="-120"/>
-              </a:rPr>
-              <a:t>Ошибка на этом этапе приводит к бесполезному набору тестов. Важно определить, какие характеристики действительно независимы и влияют на поведение.</a:t>
-            </a:r>
-            <a:endParaRPr lang="en-US" sz="1050" dirty="0"/>
-          </a:p>
-        </p:txBody>
-      </p:sp>
-      <p:pic>
-        <p:nvPicPr>
-          <p:cNvPr id="8" name="Image 2" descr="preencoded.png">    </p:cNvPr>
-          <p:cNvPicPr>
-            <a:picLocks noChangeAspect="1"/>
-          </p:cNvPicPr>
-          <p:nvPr/>
-        </p:nvPicPr>
-        <p:blipFill>
-          <a:blip r:embed="rId3">
+          <a:blip>
             <a:extLst>
               <a:ext uri="{96DAC541-7B7A-43D3-8B79-37D633B846F1}">
-                <asvg:svgBlip xmlns:asvg="http://schemas.microsoft.com/office/drawing/2016/SVG/main" r:embed="rId4"/>
+                <asvg:svgBlip xmlns:asvg="http://schemas.microsoft.com/office/drawing/2016/SVG/main" r:embed="rId5"/>
               </a:ext>
             </a:extLst>
           </a:blip>
@@ -3891,7 +3529,7 @@
           <a:bodyPr wrap="none" lIns="0" tIns="0" rIns="0" bIns="0" rtlCol="0" anchor="t"/>
           <a:lstStyle/>
           <a:p>
-            <a:pPr algn="l" indent="0" marL="0">
+            <a:pPr marL="0" indent="0" algn="l">
               <a:lnSpc>
                 <a:spcPct val="104000"/>
               </a:lnSpc>
@@ -3933,7 +3571,7 @@
           <a:bodyPr wrap="none" lIns="0" tIns="0" rIns="0" bIns="0" rtlCol="0" anchor="t"/>
           <a:lstStyle/>
           <a:p>
-            <a:pPr algn="l" indent="0" marL="0">
+            <a:pPr marL="0" indent="0" algn="l">
               <a:lnSpc>
                 <a:spcPct val="116000"/>
               </a:lnSpc>
@@ -3956,17 +3594,17 @@
       </p:sp>
       <p:pic>
         <p:nvPicPr>
-          <p:cNvPr id="11" name="Image 3" descr="preencoded.png">    </p:cNvPr>
+          <p:cNvPr id="11" name="Image 3" descr="preencoded.png"/>
           <p:cNvPicPr>
             <a:picLocks noChangeAspect="1"/>
           </p:cNvPicPr>
           <p:nvPr/>
         </p:nvPicPr>
         <p:blipFill>
-          <a:blip r:embed="rId5">
+          <a:blip>
             <a:extLst>
               <a:ext uri="{96DAC541-7B7A-43D3-8B79-37D633B846F1}">
-                <asvg:svgBlip xmlns:asvg="http://schemas.microsoft.com/office/drawing/2016/SVG/main" r:embed="rId6"/>
+                <asvg:svgBlip xmlns:asvg="http://schemas.microsoft.com/office/drawing/2016/SVG/main" r:embed="rId5"/>
               </a:ext>
             </a:extLst>
           </a:blip>
@@ -4005,7 +3643,7 @@
           <a:bodyPr wrap="none" lIns="0" tIns="0" rIns="0" bIns="0" rtlCol="0" anchor="t"/>
           <a:lstStyle/>
           <a:p>
-            <a:pPr algn="l" indent="0" marL="0">
+            <a:pPr marL="0" indent="0" algn="l">
               <a:lnSpc>
                 <a:spcPct val="104000"/>
               </a:lnSpc>
@@ -4047,7 +3685,7 @@
           <a:bodyPr wrap="none" lIns="0" tIns="0" rIns="0" bIns="0" rtlCol="0" anchor="t"/>
           <a:lstStyle/>
           <a:p>
-            <a:pPr algn="l" indent="0" marL="0">
+            <a:pPr marL="0" indent="0" algn="l">
               <a:lnSpc>
                 <a:spcPct val="116000"/>
               </a:lnSpc>
@@ -4070,17 +3708,17 @@
       </p:sp>
       <p:pic>
         <p:nvPicPr>
-          <p:cNvPr id="14" name="Image 4" descr="preencoded.png">    </p:cNvPr>
+          <p:cNvPr id="14" name="Image 4" descr="preencoded.png"/>
           <p:cNvPicPr>
             <a:picLocks noChangeAspect="1"/>
           </p:cNvPicPr>
           <p:nvPr/>
         </p:nvPicPr>
         <p:blipFill>
-          <a:blip r:embed="rId7">
+          <a:blip>
             <a:extLst>
               <a:ext uri="{96DAC541-7B7A-43D3-8B79-37D633B846F1}">
-                <asvg:svgBlip xmlns:asvg="http://schemas.microsoft.com/office/drawing/2016/SVG/main" r:embed="rId8"/>
+                <asvg:svgBlip xmlns:asvg="http://schemas.microsoft.com/office/drawing/2016/SVG/main" r:embed="rId5"/>
               </a:ext>
             </a:extLst>
           </a:blip>
@@ -4119,7 +3757,7 @@
           <a:bodyPr wrap="none" lIns="0" tIns="0" rIns="0" bIns="0" rtlCol="0" anchor="t"/>
           <a:lstStyle/>
           <a:p>
-            <a:pPr algn="l" indent="0" marL="0">
+            <a:pPr marL="0" indent="0" algn="l">
               <a:lnSpc>
                 <a:spcPct val="104000"/>
               </a:lnSpc>
@@ -4161,7 +3799,7 @@
           <a:bodyPr wrap="none" lIns="0" tIns="0" rIns="0" bIns="0" rtlCol="0" anchor="t"/>
           <a:lstStyle/>
           <a:p>
-            <a:pPr algn="l" indent="0" marL="0">
+            <a:pPr marL="0" indent="0" algn="l">
               <a:lnSpc>
                 <a:spcPct val="116000"/>
               </a:lnSpc>
@@ -4228,7 +3866,7 @@
           <a:bodyPr wrap="none" lIns="0" tIns="0" rIns="0" bIns="0" rtlCol="0" anchor="t"/>
           <a:lstStyle/>
           <a:p>
-            <a:pPr algn="l" indent="0" marL="0">
+            <a:pPr marL="0" indent="0" algn="l">
               <a:lnSpc>
                 <a:spcPct val="104000"/>
               </a:lnSpc>
@@ -4272,7 +3910,7 @@
           </a:bodyPr>
           <a:lstStyle/>
           <a:p>
-            <a:pPr algn="l" indent="0" marL="0">
+            <a:pPr marL="0" indent="0" algn="l">
               <a:lnSpc>
                 <a:spcPct val="130000"/>
               </a:lnSpc>
@@ -4292,15 +3930,6 @@
               </a:rPr>
               <a:t>Каждый тест содержит по одному значению каждого параметра. Задача — выбрать </a:t>
             </a:r>
-            <a:pPr algn="l" indent="0" marL="0">
-              <a:lnSpc>
-                <a:spcPct val="130000"/>
-              </a:lnSpc>
-              <a:spcAft>
-                <a:spcPts val="1200"/>
-              </a:spcAft>
-              <a:buNone/>
-            </a:pPr>
             <a:r>
               <a:rPr lang="en-US" sz="1400" b="1" dirty="0">
                 <a:solidFill>
@@ -4312,15 +3941,6 @@
               </a:rPr>
               <a:t>минимальное количество комбинаций</a:t>
             </a:r>
-            <a:pPr algn="l" indent="0" marL="0">
-              <a:lnSpc>
-                <a:spcPct val="130000"/>
-              </a:lnSpc>
-              <a:spcAft>
-                <a:spcPts val="1200"/>
-              </a:spcAft>
-              <a:buNone/>
-            </a:pPr>
             <a:r>
               <a:rPr lang="en-US" sz="1400" dirty="0">
                 <a:solidFill>
@@ -4335,7 +3955,7 @@
             <a:endParaRPr lang="en-US" sz="1400" dirty="0"/>
           </a:p>
           <a:p>
-            <a:pPr algn="l" indent="0" marL="0">
+            <a:pPr marL="0" indent="0" algn="l">
               <a:lnSpc>
                 <a:spcPct val="130000"/>
               </a:lnSpc>
@@ -4352,30 +3972,130 @@
               </a:rPr>
               <a:t>Например, если браузеров два, ОС две и ролей две, полный перебор даёт </a:t>
             </a:r>
-            <a:pPr algn="l" indent="0" marL="0">
+            <a:r>
+              <a:rPr lang="en-US" sz="1400" b="1" dirty="0">
+                <a:solidFill>
+                  <a:srgbClr val="000000"/>
+                </a:solidFill>
+                <a:latin typeface="Open Sans Bold" pitchFamily="34" charset="0"/>
+                <a:ea typeface="Open Sans Bold" pitchFamily="34" charset="-122"/>
+                <a:cs typeface="Open Sans Bold" pitchFamily="34" charset="-120"/>
+              </a:rPr>
+              <a:t>8 комбинаций</a:t>
+            </a:r>
+            <a:r>
+              <a:rPr lang="en-US" sz="1400" dirty="0">
+                <a:solidFill>
+                  <a:srgbClr val="000000"/>
+                </a:solidFill>
+                <a:latin typeface="Open Sans" pitchFamily="34" charset="0"/>
+                <a:ea typeface="Open Sans" pitchFamily="34" charset="-122"/>
+                <a:cs typeface="Open Sans" pitchFamily="34" charset="-120"/>
+              </a:rPr>
+              <a:t>. Попарное тестирование может обойтись </a:t>
+            </a:r>
+            <a:r>
+              <a:rPr lang="en-US" sz="1400" b="1" dirty="0">
+                <a:solidFill>
+                  <a:srgbClr val="000000"/>
+                </a:solidFill>
+                <a:latin typeface="Open Sans Bold" pitchFamily="34" charset="0"/>
+                <a:ea typeface="Open Sans Bold" pitchFamily="34" charset="-122"/>
+                <a:cs typeface="Open Sans Bold" pitchFamily="34" charset="-120"/>
+              </a:rPr>
+              <a:t>4–5 комбинациями</a:t>
+            </a:r>
+            <a:r>
+              <a:rPr lang="en-US" sz="1400" dirty="0">
+                <a:solidFill>
+                  <a:srgbClr val="000000"/>
+                </a:solidFill>
+                <a:latin typeface="Open Sans" pitchFamily="34" charset="0"/>
+                <a:ea typeface="Open Sans" pitchFamily="34" charset="-122"/>
+                <a:cs typeface="Open Sans" pitchFamily="34" charset="-120"/>
+              </a:rPr>
+              <a:t>, где каждая пара всё равно встретится.</a:t>
+            </a:r>
+            <a:endParaRPr lang="en-US" sz="1400" dirty="0"/>
+          </a:p>
+        </p:txBody>
+      </p:sp>
+      <p:sp>
+        <p:nvSpPr>
+          <p:cNvPr id="4" name="Shape 2"/>
+          <p:cNvSpPr/>
+          <p:nvPr/>
+        </p:nvSpPr>
+        <p:spPr>
+          <a:xfrm>
+            <a:off x="661475" y="4352826"/>
+            <a:ext cx="5215303" cy="1517055"/>
+          </a:xfrm>
+          <a:prstGeom prst="roundRect">
+            <a:avLst>
+              <a:gd name="adj" fmla="val 4971"/>
+            </a:avLst>
+          </a:prstGeom>
+          <a:solidFill>
+            <a:srgbClr val="B6D6FC"/>
+          </a:solidFill>
+          <a:ln/>
+        </p:spPr>
+      </p:sp>
+      <p:pic>
+        <p:nvPicPr>
+          <p:cNvPr id="5" name="Image 0" descr="preencoded.png"/>
+          <p:cNvPicPr>
+            <a:picLocks noChangeAspect="1"/>
+          </p:cNvPicPr>
+          <p:nvPr/>
+        </p:nvPicPr>
+        <p:blipFill>
+          <a:blip r:embed="rId3"/>
+          <a:stretch>
+            <a:fillRect/>
+          </a:stretch>
+        </p:blipFill>
+        <p:spPr>
+          <a:xfrm>
+            <a:off x="840957" y="4620716"/>
+            <a:ext cx="224427" cy="179487"/>
+          </a:xfrm>
+          <a:prstGeom prst="rect">
+            <a:avLst/>
+          </a:prstGeom>
+        </p:spPr>
+      </p:pic>
+      <p:sp>
+        <p:nvSpPr>
+          <p:cNvPr id="6" name="Text 3"/>
+          <p:cNvSpPr/>
+          <p:nvPr/>
+        </p:nvSpPr>
+        <p:spPr>
+          <a:xfrm>
+            <a:off x="1244867" y="4551164"/>
+            <a:ext cx="4452429" cy="1120378"/>
+          </a:xfrm>
+          <a:prstGeom prst="rect">
+            <a:avLst/>
+          </a:prstGeom>
+          <a:noFill/>
+          <a:ln/>
+        </p:spPr>
+        <p:txBody>
+          <a:bodyPr wrap="square" lIns="0" tIns="0" rIns="0" bIns="0" rtlCol="0" anchor="t">
+            <a:normAutofit/>
+          </a:bodyPr>
+          <a:lstStyle/>
+          <a:p>
+            <a:pPr marL="0" indent="0" algn="l">
               <a:lnSpc>
                 <a:spcPct val="130000"/>
               </a:lnSpc>
               <a:buNone/>
             </a:pPr>
             <a:r>
-              <a:rPr lang="en-US" sz="1400" b="1" dirty="0">
-                <a:solidFill>
-                  <a:srgbClr val="000000"/>
-                </a:solidFill>
-                <a:latin typeface="Open Sans Bold" pitchFamily="34" charset="0"/>
-                <a:ea typeface="Open Sans Bold" pitchFamily="34" charset="-122"/>
-                <a:cs typeface="Open Sans Bold" pitchFamily="34" charset="-120"/>
-              </a:rPr>
-              <a:t>8 комбинаций</a:t>
-            </a:r>
-            <a:pPr algn="l" indent="0" marL="0">
-              <a:lnSpc>
-                <a:spcPct val="130000"/>
-              </a:lnSpc>
-              <a:buNone/>
-            </a:pPr>
-            <a:r>
               <a:rPr lang="en-US" sz="1400" dirty="0">
                 <a:solidFill>
                   <a:srgbClr val="000000"/>
@@ -4384,146 +4104,22 @@
                 <a:ea typeface="Open Sans" pitchFamily="34" charset="-122"/>
                 <a:cs typeface="Open Sans" pitchFamily="34" charset="-120"/>
               </a:rPr>
-              <a:t>. Попарное тестирование может обойтись </a:t>
-            </a:r>
-            <a:pPr algn="l" indent="0" marL="0">
-              <a:lnSpc>
-                <a:spcPct val="130000"/>
-              </a:lnSpc>
-              <a:buNone/>
-            </a:pPr>
-            <a:r>
-              <a:rPr lang="en-US" sz="1400" b="1" dirty="0">
-                <a:solidFill>
-                  <a:srgbClr val="000000"/>
-                </a:solidFill>
-                <a:latin typeface="Open Sans Bold" pitchFamily="34" charset="0"/>
-                <a:ea typeface="Open Sans Bold" pitchFamily="34" charset="-122"/>
-                <a:cs typeface="Open Sans Bold" pitchFamily="34" charset="-120"/>
-              </a:rPr>
-              <a:t>4–5 комбинациями</a:t>
-            </a:r>
-            <a:pPr algn="l" indent="0" marL="0">
-              <a:lnSpc>
-                <a:spcPct val="130000"/>
-              </a:lnSpc>
-              <a:buNone/>
-            </a:pPr>
-            <a:r>
-              <a:rPr lang="en-US" sz="1400" dirty="0">
-                <a:solidFill>
-                  <a:srgbClr val="000000"/>
-                </a:solidFill>
-                <a:latin typeface="Open Sans" pitchFamily="34" charset="0"/>
-                <a:ea typeface="Open Sans" pitchFamily="34" charset="-122"/>
-                <a:cs typeface="Open Sans" pitchFamily="34" charset="-120"/>
-              </a:rPr>
-              <a:t>, где каждая пара всё равно встретится.</a:t>
+              <a:t>Для большого числа параметров используются специальные генераторы. Но тестировщик должен понимать принцип, чтобы правильно передать параметры инструменту.</a:t>
             </a:r>
             <a:endParaRPr lang="en-US" sz="1400" dirty="0"/>
           </a:p>
         </p:txBody>
-      </p:sp>
-      <p:sp>
-        <p:nvSpPr>
-          <p:cNvPr id="4" name="Shape 2"/>
-          <p:cNvSpPr/>
-          <p:nvPr/>
-        </p:nvSpPr>
-        <p:spPr>
-          <a:xfrm>
-            <a:off x="661475" y="4352826"/>
-            <a:ext cx="5215303" cy="1517055"/>
-          </a:xfrm>
-          <a:prstGeom prst="roundRect">
-            <a:avLst>
-              <a:gd name="adj" fmla="val 4971"/>
-            </a:avLst>
-          </a:prstGeom>
-          <a:solidFill>
-            <a:srgbClr val="B6D6FC"/>
-          </a:solidFill>
-          <a:ln/>
-        </p:spPr>
       </p:sp>
       <p:pic>
         <p:nvPicPr>
-          <p:cNvPr id="5" name="Image 0" descr="preencoded.png">    </p:cNvPr>
+          <p:cNvPr id="7" name="Image 1" descr="preencoded.png"/>
           <p:cNvPicPr>
             <a:picLocks noChangeAspect="1"/>
           </p:cNvPicPr>
           <p:nvPr/>
         </p:nvPicPr>
         <p:blipFill>
-          <a:blip r:embed="rId1"/>
-          <a:stretch>
-            <a:fillRect/>
-          </a:stretch>
-        </p:blipFill>
-        <p:spPr>
-          <a:xfrm>
-            <a:off x="840957" y="4620716"/>
-            <a:ext cx="224427" cy="179487"/>
-          </a:xfrm>
-          <a:prstGeom prst="rect">
-            <a:avLst/>
-          </a:prstGeom>
-        </p:spPr>
-      </p:pic>
-      <p:sp>
-        <p:nvSpPr>
-          <p:cNvPr id="6" name="Text 3"/>
-          <p:cNvSpPr/>
-          <p:nvPr/>
-        </p:nvSpPr>
-        <p:spPr>
-          <a:xfrm>
-            <a:off x="1244867" y="4551164"/>
-            <a:ext cx="4452429" cy="1120378"/>
-          </a:xfrm>
-          <a:prstGeom prst="rect">
-            <a:avLst/>
-          </a:prstGeom>
-          <a:noFill/>
-          <a:ln/>
-        </p:spPr>
-        <p:txBody>
-          <a:bodyPr wrap="square" lIns="0" tIns="0" rIns="0" bIns="0" rtlCol="0" anchor="t">
-            <a:normAutofit/>
-          </a:bodyPr>
-          <a:lstStyle/>
-          <a:p>
-            <a:pPr algn="l" indent="0" marL="0">
-              <a:lnSpc>
-                <a:spcPct val="130000"/>
-              </a:lnSpc>
-              <a:buNone/>
-            </a:pPr>
-            <a:r>
-              <a:rPr lang="en-US" sz="1400" dirty="0">
-                <a:solidFill>
-                  <a:srgbClr val="000000"/>
-                </a:solidFill>
-                <a:latin typeface="Open Sans" pitchFamily="34" charset="0"/>
-                <a:ea typeface="Open Sans" pitchFamily="34" charset="-122"/>
-                <a:cs typeface="Open Sans" pitchFamily="34" charset="-120"/>
-              </a:rPr>
-              <a:t>Для большого числа параметров используются специальные генераторы. Но тестировщик должен понимать принцип, чтобы правильно передать параметры инструменту.</a:t>
-            </a:r>
-            <a:endParaRPr lang="en-US" sz="1400" dirty="0"/>
-          </a:p>
-        </p:txBody>
-      </p:sp>
-      <p:pic>
-        <p:nvPicPr>
-          <p:cNvPr id="7" name="Image 1" descr="preencoded.png">    </p:cNvPr>
-          <p:cNvPicPr>
-            <a:picLocks noChangeAspect="1"/>
-          </p:cNvPicPr>
-          <p:nvPr/>
-        </p:nvPicPr>
-        <p:blipFill>
-          <a:blip r:embed="rId2"/>
+          <a:blip r:embed="rId4"/>
           <a:stretch>
             <a:fillRect/>
           </a:stretch>
@@ -4586,7 +4182,7 @@
           </a:bodyPr>
           <a:lstStyle/>
           <a:p>
-            <a:pPr algn="l" indent="0" marL="0">
+            <a:pPr marL="0" indent="0" algn="l">
               <a:lnSpc>
                 <a:spcPct val="104000"/>
               </a:lnSpc>
@@ -4630,7 +4226,7 @@
           </a:bodyPr>
           <a:lstStyle/>
           <a:p>
-            <a:pPr algn="l" indent="0" marL="0">
+            <a:pPr marL="0" indent="0" algn="l">
               <a:lnSpc>
                 <a:spcPct val="130000"/>
               </a:lnSpc>
@@ -4647,12 +4243,6 @@
               </a:rPr>
               <a:t>Приложение проверяется при двух браузерах (Chrome, Firefox), двух ОС (Windows, Linux) и двух ролях (администратор, пользователь). Полный перебор: </a:t>
             </a:r>
-            <a:pPr algn="l" indent="0" marL="0">
-              <a:lnSpc>
-                <a:spcPct val="130000"/>
-              </a:lnSpc>
-              <a:buNone/>
-            </a:pPr>
             <a:r>
               <a:rPr lang="en-US" sz="1400" b="1" dirty="0">
                 <a:solidFill>
@@ -4664,12 +4254,6 @@
               </a:rPr>
               <a:t>2 × 2 × 2 = 8 тестов</a:t>
             </a:r>
-            <a:pPr algn="l" indent="0" marL="0">
-              <a:lnSpc>
-                <a:spcPct val="130000"/>
-              </a:lnSpc>
-              <a:buNone/>
-            </a:pPr>
             <a:r>
               <a:rPr lang="en-US" sz="1400" dirty="0">
                 <a:solidFill>
@@ -4681,12 +4265,6 @@
               </a:rPr>
               <a:t>. При попарном покрытии достаточно </a:t>
             </a:r>
-            <a:pPr algn="l" indent="0" marL="0">
-              <a:lnSpc>
-                <a:spcPct val="130000"/>
-              </a:lnSpc>
-              <a:buNone/>
-            </a:pPr>
             <a:r>
               <a:rPr lang="en-US" sz="1400" b="1" dirty="0">
                 <a:solidFill>
@@ -4698,12 +4276,6 @@
               </a:rPr>
               <a:t>4 тестов</a:t>
             </a:r>
-            <a:pPr algn="l" indent="0" marL="0">
-              <a:lnSpc>
-                <a:spcPct val="130000"/>
-              </a:lnSpc>
-              <a:buNone/>
-            </a:pPr>
             <a:r>
               <a:rPr lang="en-US" sz="1400" dirty="0">
                 <a:solidFill>
@@ -4735,17 +4307,41 @@
         </p:nvGraphicFramePr>
         <p:xfrm>
           <a:off x="661475" y="3038277"/>
-          <a:ext cx="9143771" cy="914400"/>
+          <a:ext cx="10868747" cy="2512255"/>
         </p:xfrm>
         <a:graphic>
           <a:graphicData uri="http://schemas.openxmlformats.org/drawingml/2006/table">
             <a:tbl>
               <a:tblPr/>
               <a:tblGrid>
-                <a:gridCol w="1086875"/>
-                <a:gridCol w="3260624"/>
-                <a:gridCol w="3260624"/>
-                <a:gridCol w="3260624"/>
+                <a:gridCol w="1086875">
+                  <a:extLst>
+                    <a:ext uri="{9D8B030D-6E8A-4147-A177-3AD203B41FA5}">
+                      <a16:colId xmlns:a16="http://schemas.microsoft.com/office/drawing/2014/main" val="20000"/>
+                    </a:ext>
+                  </a:extLst>
+                </a:gridCol>
+                <a:gridCol w="3260624">
+                  <a:extLst>
+                    <a:ext uri="{9D8B030D-6E8A-4147-A177-3AD203B41FA5}">
+                      <a16:colId xmlns:a16="http://schemas.microsoft.com/office/drawing/2014/main" val="20001"/>
+                    </a:ext>
+                  </a:extLst>
+                </a:gridCol>
+                <a:gridCol w="3260624">
+                  <a:extLst>
+                    <a:ext uri="{9D8B030D-6E8A-4147-A177-3AD203B41FA5}">
+                      <a16:colId xmlns:a16="http://schemas.microsoft.com/office/drawing/2014/main" val="20002"/>
+                    </a:ext>
+                  </a:extLst>
+                </a:gridCol>
+                <a:gridCol w="3260624">
+                  <a:extLst>
+                    <a:ext uri="{9D8B030D-6E8A-4147-A177-3AD203B41FA5}">
+                      <a16:colId xmlns:a16="http://schemas.microsoft.com/office/drawing/2014/main" val="20003"/>
+                    </a:ext>
+                  </a:extLst>
+                </a:gridCol>
               </a:tblGrid>
               <a:tr h="500546">
                 <a:tc>
@@ -4753,7 +4349,7 @@
                     <a:bodyPr/>
                     <a:lstStyle/>
                     <a:p>
-                      <a:pPr algn="l" indent="0" marL="0">
+                      <a:pPr marL="0" indent="0" algn="l">
                         <a:buNone/>
                       </a:pPr>
                       <a:r>
@@ -4818,7 +4414,7 @@
                     <a:bodyPr/>
                     <a:lstStyle/>
                     <a:p>
-                      <a:pPr algn="l" indent="0" marL="0">
+                      <a:pPr marL="0" indent="0" algn="l">
                         <a:buNone/>
                       </a:pPr>
                       <a:r>
@@ -4842,7 +4438,7 @@
                   <a:tcPr marL="179568" marR="179568" marT="6350" marB="6350" anchor="ctr">
                     <a:lnL w="12700" cap="flat" cmpd="sng" algn="ctr">
                       <a:solidFill>
-                        <a:srgbClr val="27B29F"/>
+                        <a:srgbClr val="FFFFFF"/>
                       </a:solidFill>
                       <a:prstDash val="solid"/>
                       <a:round/>
@@ -4886,7 +4482,7 @@
                     <a:bodyPr/>
                     <a:lstStyle/>
                     <a:p>
-                      <a:pPr algn="l" indent="0" marL="0">
+                      <a:pPr marL="0" indent="0" algn="l">
                         <a:buNone/>
                       </a:pPr>
                       <a:r>
@@ -4954,7 +4550,7 @@
                     <a:bodyPr/>
                     <a:lstStyle/>
                     <a:p>
-                      <a:pPr algn="l" indent="0" marL="0">
+                      <a:pPr marL="0" indent="0" algn="l">
                         <a:buNone/>
                       </a:pPr>
                       <a:r>
@@ -5017,6 +4613,11 @@
                     </a:solidFill>
                   </a:tcPr>
                 </a:tc>
+                <a:extLst>
+                  <a:ext uri="{0D108BD9-81ED-4DB2-BD59-A6C34878D82A}">
+                    <a16:rowId xmlns:a16="http://schemas.microsoft.com/office/drawing/2014/main" val="10000"/>
+                  </a:ext>
+                </a:extLst>
               </a:tr>
               <a:tr h="503721">
                 <a:tc>
@@ -5024,7 +4625,7 @@
                     <a:bodyPr/>
                     <a:lstStyle/>
                     <a:p>
-                      <a:pPr algn="l" indent="0" marL="0">
+                      <a:pPr marL="0" indent="0" algn="l">
                         <a:buNone/>
                       </a:pPr>
                       <a:r>
@@ -5089,7 +4690,7 @@
                     <a:bodyPr/>
                     <a:lstStyle/>
                     <a:p>
-                      <a:pPr algn="l" indent="0" marL="0">
+                      <a:pPr marL="0" indent="0" algn="l">
                         <a:buNone/>
                       </a:pPr>
                       <a:r>
@@ -5154,7 +4755,7 @@
                     <a:bodyPr/>
                     <a:lstStyle/>
                     <a:p>
-                      <a:pPr algn="l" indent="0" marL="0">
+                      <a:pPr marL="0" indent="0" algn="l">
                         <a:buNone/>
                       </a:pPr>
                       <a:r>
@@ -5219,7 +4820,7 @@
                     <a:bodyPr/>
                     <a:lstStyle/>
                     <a:p>
-                      <a:pPr algn="l" indent="0" marL="0">
+                      <a:pPr marL="0" indent="0" algn="l">
                         <a:buNone/>
                       </a:pPr>
                       <a:r>
@@ -5279,6 +4880,11 @@
                     </a:lnB>
                   </a:tcPr>
                 </a:tc>
+                <a:extLst>
+                  <a:ext uri="{0D108BD9-81ED-4DB2-BD59-A6C34878D82A}">
+                    <a16:rowId xmlns:a16="http://schemas.microsoft.com/office/drawing/2014/main" val="10001"/>
+                  </a:ext>
+                </a:extLst>
               </a:tr>
               <a:tr h="503721">
                 <a:tc>
@@ -5286,7 +4892,7 @@
                     <a:bodyPr/>
                     <a:lstStyle/>
                     <a:p>
-                      <a:pPr algn="l" indent="0" marL="0">
+                      <a:pPr marL="0" indent="0" algn="l">
                         <a:buNone/>
                       </a:pPr>
                       <a:r>
@@ -5351,7 +4957,7 @@
                     <a:bodyPr/>
                     <a:lstStyle/>
                     <a:p>
-                      <a:pPr algn="l" indent="0" marL="0">
+                      <a:pPr marL="0" indent="0" algn="l">
                         <a:buNone/>
                       </a:pPr>
                       <a:r>
@@ -5416,7 +5022,7 @@
                     <a:bodyPr/>
                     <a:lstStyle/>
                     <a:p>
-                      <a:pPr algn="l" indent="0" marL="0">
+                      <a:pPr marL="0" indent="0" algn="l">
                         <a:buNone/>
                       </a:pPr>
                       <a:r>
@@ -5481,7 +5087,7 @@
                     <a:bodyPr/>
                     <a:lstStyle/>
                     <a:p>
-                      <a:pPr algn="l" indent="0" marL="0">
+                      <a:pPr marL="0" indent="0" algn="l">
                         <a:buNone/>
                       </a:pPr>
                       <a:r>
@@ -5541,6 +5147,11 @@
                     </a:lnB>
                   </a:tcPr>
                 </a:tc>
+                <a:extLst>
+                  <a:ext uri="{0D108BD9-81ED-4DB2-BD59-A6C34878D82A}">
+                    <a16:rowId xmlns:a16="http://schemas.microsoft.com/office/drawing/2014/main" val="10002"/>
+                  </a:ext>
+                </a:extLst>
               </a:tr>
               <a:tr h="503721">
                 <a:tc>
@@ -5548,7 +5159,7 @@
                     <a:bodyPr/>
                     <a:lstStyle/>
                     <a:p>
-                      <a:pPr algn="l" indent="0" marL="0">
+                      <a:pPr marL="0" indent="0" algn="l">
                         <a:buNone/>
                       </a:pPr>
                       <a:r>
@@ -5613,7 +5224,7 @@
                     <a:bodyPr/>
                     <a:lstStyle/>
                     <a:p>
-                      <a:pPr algn="l" indent="0" marL="0">
+                      <a:pPr marL="0" indent="0" algn="l">
                         <a:buNone/>
                       </a:pPr>
                       <a:r>
@@ -5678,7 +5289,7 @@
                     <a:bodyPr/>
                     <a:lstStyle/>
                     <a:p>
-                      <a:pPr algn="l" indent="0" marL="0">
+                      <a:pPr marL="0" indent="0" algn="l">
                         <a:buNone/>
                       </a:pPr>
                       <a:r>
@@ -5743,7 +5354,7 @@
                     <a:bodyPr/>
                     <a:lstStyle/>
                     <a:p>
-                      <a:pPr algn="l" indent="0" marL="0">
+                      <a:pPr marL="0" indent="0" algn="l">
                         <a:buNone/>
                       </a:pPr>
                       <a:r>
@@ -5803,6 +5414,11 @@
                     </a:lnB>
                   </a:tcPr>
                 </a:tc>
+                <a:extLst>
+                  <a:ext uri="{0D108BD9-81ED-4DB2-BD59-A6C34878D82A}">
+                    <a16:rowId xmlns:a16="http://schemas.microsoft.com/office/drawing/2014/main" val="10003"/>
+                  </a:ext>
+                </a:extLst>
               </a:tr>
               <a:tr h="500546">
                 <a:tc>
@@ -5810,7 +5426,7 @@
                     <a:bodyPr/>
                     <a:lstStyle/>
                     <a:p>
-                      <a:pPr algn="l" indent="0" marL="0">
+                      <a:pPr marL="0" indent="0" algn="l">
                         <a:buNone/>
                       </a:pPr>
                       <a:r>
@@ -5875,7 +5491,7 @@
                     <a:bodyPr/>
                     <a:lstStyle/>
                     <a:p>
-                      <a:pPr algn="l" indent="0" marL="0">
+                      <a:pPr marL="0" indent="0" algn="l">
                         <a:buNone/>
                       </a:pPr>
                       <a:r>
@@ -5940,7 +5556,7 @@
                     <a:bodyPr/>
                     <a:lstStyle/>
                     <a:p>
-                      <a:pPr algn="l" indent="0" marL="0">
+                      <a:pPr marL="0" indent="0" algn="l">
                         <a:buNone/>
                       </a:pPr>
                       <a:r>
@@ -6005,7 +5621,7 @@
                     <a:bodyPr/>
                     <a:lstStyle/>
                     <a:p>
-                      <a:pPr algn="l" indent="0" marL="0">
+                      <a:pPr marL="0" indent="0" algn="l">
                         <a:buNone/>
                       </a:pPr>
                       <a:r>
@@ -6065,6 +5681,11 @@
                     </a:lnB>
                   </a:tcPr>
                 </a:tc>
+                <a:extLst>
+                  <a:ext uri="{0D108BD9-81ED-4DB2-BD59-A6C34878D82A}">
+                    <a16:rowId xmlns:a16="http://schemas.microsoft.com/office/drawing/2014/main" val="10004"/>
+                  </a:ext>
+                </a:extLst>
               </a:tr>
             </a:tbl>
           </a:graphicData>
@@ -6091,7 +5712,7 @@
           <a:bodyPr wrap="none" lIns="0" tIns="0" rIns="0" bIns="0" rtlCol="0" anchor="t"/>
           <a:lstStyle/>
           <a:p>
-            <a:pPr algn="l" indent="0" marL="0">
+            <a:pPr marL="0" indent="0" algn="l">
               <a:lnSpc>
                 <a:spcPct val="130000"/>
               </a:lnSpc>
@@ -6159,14 +5780,14 @@
       </p:sp>
       <p:pic>
         <p:nvPicPr>
-          <p:cNvPr id="3" name="Image 0" descr="preencoded.png">    </p:cNvPr>
+          <p:cNvPr id="3" name="Image 0" descr="preencoded.png"/>
           <p:cNvPicPr>
             <a:picLocks noChangeAspect="1"/>
           </p:cNvPicPr>
           <p:nvPr/>
         </p:nvPicPr>
         <p:blipFill>
-          <a:blip r:embed="rId1"/>
+          <a:blip r:embed="rId3"/>
           <a:stretch>
             <a:fillRect/>
           </a:stretch>
@@ -6204,7 +5825,7 @@
           </a:bodyPr>
           <a:lstStyle/>
           <a:p>
-            <a:pPr algn="l" indent="0" marL="0">
+            <a:pPr marL="0" indent="0" algn="l">
               <a:lnSpc>
                 <a:spcPct val="104000"/>
               </a:lnSpc>
@@ -6246,7 +5867,7 @@
           <a:bodyPr wrap="none" lIns="0" tIns="0" rIns="0" bIns="0" rtlCol="0" anchor="t"/>
           <a:lstStyle/>
           <a:p>
-            <a:pPr algn="l" indent="0" marL="0">
+            <a:pPr marL="0" indent="0" algn="l">
               <a:lnSpc>
                 <a:spcPct val="104000"/>
               </a:lnSpc>
@@ -6290,7 +5911,7 @@
           </a:bodyPr>
           <a:lstStyle/>
           <a:p>
-            <a:pPr algn="l" indent="0" marL="0">
+            <a:pPr marL="0" indent="0" algn="l">
               <a:lnSpc>
                 <a:spcPct val="127000"/>
               </a:lnSpc>
@@ -6332,7 +5953,7 @@
           <a:bodyPr wrap="none" lIns="0" tIns="0" rIns="0" bIns="0" rtlCol="0" anchor="t"/>
           <a:lstStyle/>
           <a:p>
-            <a:pPr algn="l" indent="0" marL="0">
+            <a:pPr marL="0" indent="0" algn="l">
               <a:lnSpc>
                 <a:spcPct val="104000"/>
               </a:lnSpc>
@@ -6376,7 +5997,7 @@
           </a:bodyPr>
           <a:lstStyle/>
           <a:p>
-            <a:pPr algn="l" indent="0" marL="0">
+            <a:pPr marL="0" indent="0" algn="l">
               <a:lnSpc>
                 <a:spcPct val="127000"/>
               </a:lnSpc>
@@ -6393,7 +6014,87 @@
               </a:rPr>
               <a:t>До</a:t>
             </a:r>
-            <a:pPr algn="l" indent="0" marL="0">
+            <a:r>
+              <a:rPr lang="en-US" sz="1300" dirty="0">
+                <a:solidFill>
+                  <a:srgbClr val="000000"/>
+                </a:solidFill>
+                <a:latin typeface="Open Sans" pitchFamily="34" charset="0"/>
+                <a:ea typeface="Open Sans" pitchFamily="34" charset="-122"/>
+                <a:cs typeface="Open Sans" pitchFamily="34" charset="-120"/>
+              </a:rPr>
+              <a:t> построения набора — на основе требований, а не после генерации. Это позволяет сразу получить корректный набор тестов.</a:t>
+            </a:r>
+            <a:endParaRPr lang="en-US" sz="1300" dirty="0"/>
+          </a:p>
+        </p:txBody>
+      </p:sp>
+      <p:sp>
+        <p:nvSpPr>
+          <p:cNvPr id="9" name="Text 6"/>
+          <p:cNvSpPr/>
+          <p:nvPr/>
+        </p:nvSpPr>
+        <p:spPr>
+          <a:xfrm>
+            <a:off x="1197243" y="5301655"/>
+            <a:ext cx="5761092" cy="265708"/>
+          </a:xfrm>
+          <a:prstGeom prst="rect">
+            <a:avLst/>
+          </a:prstGeom>
+          <a:noFill/>
+          <a:ln/>
+        </p:spPr>
+        <p:txBody>
+          <a:bodyPr wrap="none" lIns="0" tIns="0" rIns="0" bIns="0" rtlCol="0" anchor="t"/>
+          <a:lstStyle/>
+          <a:p>
+            <a:pPr marL="0" indent="0" algn="l">
+              <a:lnSpc>
+                <a:spcPct val="104000"/>
+              </a:lnSpc>
+              <a:buNone/>
+            </a:pPr>
+            <a:r>
+              <a:rPr lang="en-US" sz="1650" b="1" dirty="0">
+                <a:solidFill>
+                  <a:srgbClr val="000000"/>
+                </a:solidFill>
+                <a:latin typeface="Montserrat Bold" pitchFamily="34" charset="0"/>
+                <a:ea typeface="Montserrat Bold" pitchFamily="34" charset="-122"/>
+                <a:cs typeface="Montserrat Bold" pitchFamily="34" charset="-120"/>
+              </a:rPr>
+              <a:t>Важное правило</a:t>
+            </a:r>
+            <a:endParaRPr lang="en-US" sz="1650" dirty="0"/>
+          </a:p>
+        </p:txBody>
+      </p:sp>
+      <p:sp>
+        <p:nvSpPr>
+          <p:cNvPr id="10" name="Text 7"/>
+          <p:cNvSpPr/>
+          <p:nvPr/>
+        </p:nvSpPr>
+        <p:spPr>
+          <a:xfrm>
+            <a:off x="1197243" y="5659140"/>
+            <a:ext cx="5761092" cy="517128"/>
+          </a:xfrm>
+          <a:prstGeom prst="rect">
+            <a:avLst/>
+          </a:prstGeom>
+          <a:noFill/>
+          <a:ln/>
+        </p:spPr>
+        <p:txBody>
+          <a:bodyPr wrap="square" lIns="0" tIns="0" rIns="0" bIns="0" rtlCol="0" anchor="t">
+            <a:normAutofit/>
+          </a:bodyPr>
+          <a:lstStyle/>
+          <a:p>
+            <a:pPr marL="0" indent="0" algn="l">
               <a:lnSpc>
                 <a:spcPct val="127000"/>
               </a:lnSpc>
@@ -6408,100 +6109,8 @@
                 <a:ea typeface="Open Sans" pitchFamily="34" charset="-122"/>
                 <a:cs typeface="Open Sans" pitchFamily="34" charset="-120"/>
               </a:rPr>
-              <a:t> построения набора — на основе требований, а не после генерации. Это позволяет сразу получить корректный набор тестов.</a:t>
-            </a:r>
-            <a:endParaRPr lang="en-US" sz="1300" dirty="0"/>
-          </a:p>
-        </p:txBody>
-      </p:sp>
-      <p:sp>
-        <p:nvSpPr>
-          <p:cNvPr id="9" name="Text 6"/>
-          <p:cNvSpPr/>
-          <p:nvPr/>
-        </p:nvSpPr>
-        <p:spPr>
-          <a:xfrm>
-            <a:off x="1197243" y="5301655"/>
-            <a:ext cx="5761092" cy="265708"/>
-          </a:xfrm>
-          <a:prstGeom prst="rect">
-            <a:avLst/>
-          </a:prstGeom>
-          <a:noFill/>
-          <a:ln/>
-        </p:spPr>
-        <p:txBody>
-          <a:bodyPr wrap="none" lIns="0" tIns="0" rIns="0" bIns="0" rtlCol="0" anchor="t"/>
-          <a:lstStyle/>
-          <a:p>
-            <a:pPr algn="l" indent="0" marL="0">
-              <a:lnSpc>
-                <a:spcPct val="104000"/>
-              </a:lnSpc>
-              <a:buNone/>
-            </a:pPr>
-            <a:r>
-              <a:rPr lang="en-US" sz="1650" b="1" dirty="0">
-                <a:solidFill>
-                  <a:srgbClr val="000000"/>
-                </a:solidFill>
-                <a:latin typeface="Montserrat Bold" pitchFamily="34" charset="0"/>
-                <a:ea typeface="Montserrat Bold" pitchFamily="34" charset="-122"/>
-                <a:cs typeface="Montserrat Bold" pitchFamily="34" charset="-120"/>
-              </a:rPr>
-              <a:t>Важное правило</a:t>
-            </a:r>
-            <a:endParaRPr lang="en-US" sz="1650" dirty="0"/>
-          </a:p>
-        </p:txBody>
-      </p:sp>
-      <p:sp>
-        <p:nvSpPr>
-          <p:cNvPr id="10" name="Text 7"/>
-          <p:cNvSpPr/>
-          <p:nvPr/>
-        </p:nvSpPr>
-        <p:spPr>
-          <a:xfrm>
-            <a:off x="1197243" y="5659140"/>
-            <a:ext cx="5761092" cy="517128"/>
-          </a:xfrm>
-          <a:prstGeom prst="rect">
-            <a:avLst/>
-          </a:prstGeom>
-          <a:noFill/>
-          <a:ln/>
-        </p:spPr>
-        <p:txBody>
-          <a:bodyPr wrap="square" lIns="0" tIns="0" rIns="0" bIns="0" rtlCol="0" anchor="t">
-            <a:normAutofit/>
-          </a:bodyPr>
-          <a:lstStyle/>
-          <a:p>
-            <a:pPr algn="l" indent="0" marL="0">
-              <a:lnSpc>
-                <a:spcPct val="127000"/>
-              </a:lnSpc>
-              <a:buNone/>
-            </a:pPr>
-            <a:r>
-              <a:rPr lang="en-US" sz="1300" dirty="0">
-                <a:solidFill>
-                  <a:srgbClr val="000000"/>
-                </a:solidFill>
-                <a:latin typeface="Open Sans" pitchFamily="34" charset="0"/>
-                <a:ea typeface="Open Sans" pitchFamily="34" charset="-122"/>
-                <a:cs typeface="Open Sans" pitchFamily="34" charset="-120"/>
-              </a:rPr>
               <a:t>Исключать только то, что </a:t>
             </a:r>
-            <a:pPr algn="l" indent="0" marL="0">
-              <a:lnSpc>
-                <a:spcPct val="127000"/>
-              </a:lnSpc>
-              <a:buNone/>
-            </a:pPr>
             <a:r>
               <a:rPr lang="en-US" sz="1300" b="1" dirty="0">
                 <a:solidFill>
@@ -6513,12 +6122,6 @@
               </a:rPr>
               <a:t>действительно невозможно</a:t>
             </a:r>
-            <a:pPr algn="l" indent="0" marL="0">
-              <a:lnSpc>
-                <a:spcPct val="127000"/>
-              </a:lnSpc>
-              <a:buNone/>
-            </a:pPr>
             <a:r>
               <a:rPr lang="en-US" sz="1300" dirty="0">
                 <a:solidFill>
@@ -6582,7 +6185,7 @@
           </a:bodyPr>
           <a:lstStyle/>
           <a:p>
-            <a:pPr algn="l" indent="0" marL="0">
+            <a:pPr marL="0" indent="0" algn="l">
               <a:lnSpc>
                 <a:spcPct val="104000"/>
               </a:lnSpc>
@@ -6605,14 +6208,14 @@
       </p:sp>
       <p:pic>
         <p:nvPicPr>
-          <p:cNvPr id="3" name="Image 0" descr="preencoded.png">    </p:cNvPr>
+          <p:cNvPr id="3" name="Image 0" descr="preencoded.png"/>
           <p:cNvPicPr>
             <a:picLocks noChangeAspect="1"/>
           </p:cNvPicPr>
           <p:nvPr/>
         </p:nvPicPr>
         <p:blipFill>
-          <a:blip r:embed="rId1"/>
+          <a:blip r:embed="rId3"/>
           <a:stretch>
             <a:fillRect/>
           </a:stretch>
@@ -6650,7 +6253,7 @@
           </a:bodyPr>
           <a:lstStyle/>
           <a:p>
-            <a:pPr algn="l" indent="0" marL="0">
+            <a:pPr marL="0" indent="0" algn="l">
               <a:lnSpc>
                 <a:spcPct val="133000"/>
               </a:lnSpc>
@@ -6670,15 +6273,6 @@
               </a:rPr>
               <a:t>Случайный выбор нескольких тестов </a:t>
             </a:r>
-            <a:pPr algn="l" indent="0" marL="0">
-              <a:lnSpc>
-                <a:spcPct val="133000"/>
-              </a:lnSpc>
-              <a:spcAft>
-                <a:spcPts val="1300"/>
-              </a:spcAft>
-              <a:buNone/>
-            </a:pPr>
             <a:r>
               <a:rPr lang="en-US" sz="1450" b="1" dirty="0">
                 <a:solidFill>
@@ -6690,15 +6284,6 @@
               </a:rPr>
               <a:t>не гарантирует покрытие нужных пар</a:t>
             </a:r>
-            <a:pPr algn="l" indent="0" marL="0">
-              <a:lnSpc>
-                <a:spcPct val="133000"/>
-              </a:lnSpc>
-              <a:spcAft>
-                <a:spcPts val="1300"/>
-              </a:spcAft>
-              <a:buNone/>
-            </a:pPr>
             <a:r>
               <a:rPr lang="en-US" sz="1450" dirty="0">
                 <a:solidFill>
@@ -6713,7 +6298,7 @@
             <a:endParaRPr lang="en-US" sz="1450" dirty="0"/>
           </a:p>
           <a:p>
-            <a:pPr algn="l" indent="0" marL="0">
+            <a:pPr marL="0" indent="0" algn="l">
               <a:lnSpc>
                 <a:spcPct val="133000"/>
               </a:lnSpc>
@@ -6730,12 +6315,6 @@
               </a:rPr>
               <a:t>Попарное тестирование — это </a:t>
             </a:r>
-            <a:pPr algn="l" indent="0" marL="0">
-              <a:lnSpc>
-                <a:spcPct val="133000"/>
-              </a:lnSpc>
-              <a:buNone/>
-            </a:pPr>
             <a:r>
               <a:rPr lang="en-US" sz="1450" b="1" dirty="0">
                 <a:solidFill>
@@ -6747,12 +6326,6 @@
               </a:rPr>
               <a:t>формализованный подход</a:t>
             </a:r>
-            <a:pPr algn="l" indent="0" marL="0">
-              <a:lnSpc>
-                <a:spcPct val="133000"/>
-              </a:lnSpc>
-              <a:buNone/>
-            </a:pPr>
             <a:r>
               <a:rPr lang="en-US" sz="1450" dirty="0">
                 <a:solidFill>
@@ -6792,14 +6365,14 @@
       </p:sp>
       <p:pic>
         <p:nvPicPr>
-          <p:cNvPr id="6" name="Image 1" descr="preencoded.png">    </p:cNvPr>
+          <p:cNvPr id="6" name="Image 1" descr="preencoded.png"/>
           <p:cNvPicPr>
             <a:picLocks noChangeAspect="1"/>
           </p:cNvPicPr>
           <p:nvPr/>
         </p:nvPicPr>
         <p:blipFill>
-          <a:blip r:embed="rId2"/>
+          <a:blip r:embed="rId4"/>
           <a:stretch>
             <a:fillRect/>
           </a:stretch>
@@ -6837,7 +6410,7 @@
           </a:bodyPr>
           <a:lstStyle/>
           <a:p>
-            <a:pPr algn="l" indent="0" marL="0">
+            <a:pPr marL="0" indent="0" algn="l">
               <a:lnSpc>
                 <a:spcPct val="133000"/>
               </a:lnSpc>
@@ -6905,14 +6478,14 @@
       </p:sp>
       <p:pic>
         <p:nvPicPr>
-          <p:cNvPr id="3" name="Image 0" descr="preencoded.png">    </p:cNvPr>
+          <p:cNvPr id="3" name="Image 0" descr="preencoded.png"/>
           <p:cNvPicPr>
             <a:picLocks noChangeAspect="1"/>
           </p:cNvPicPr>
           <p:nvPr/>
         </p:nvPicPr>
         <p:blipFill>
-          <a:blip r:embed="rId1"/>
+          <a:blip r:embed="rId3"/>
           <a:stretch>
             <a:fillRect/>
           </a:stretch>
@@ -6950,7 +6523,7 @@
           </a:bodyPr>
           <a:lstStyle/>
           <a:p>
-            <a:pPr algn="l" indent="0" marL="0">
+            <a:pPr marL="0" indent="0" algn="l">
               <a:lnSpc>
                 <a:spcPct val="104000"/>
               </a:lnSpc>
@@ -6994,7 +6567,7 @@
           </a:bodyPr>
           <a:lstStyle/>
           <a:p>
-            <a:pPr algn="l" indent="0" marL="0">
+            <a:pPr marL="0" indent="0" algn="l">
               <a:lnSpc>
                 <a:spcPct val="123000"/>
               </a:lnSpc>
@@ -7014,15 +6587,6 @@
               </a:rPr>
               <a:t>Техника </a:t>
             </a:r>
-            <a:pPr algn="l" indent="0" marL="0">
-              <a:lnSpc>
-                <a:spcPct val="123000"/>
-              </a:lnSpc>
-              <a:spcAft>
-                <a:spcPts val="950"/>
-              </a:spcAft>
-              <a:buNone/>
-            </a:pPr>
             <a:r>
               <a:rPr lang="en-US" sz="1250" b="1" dirty="0">
                 <a:solidFill>
@@ -7034,15 +6598,6 @@
               </a:rPr>
               <a:t>не ловит дефекты</a:t>
             </a:r>
-            <a:pPr algn="l" indent="0" marL="0">
-              <a:lnSpc>
-                <a:spcPct val="123000"/>
-              </a:lnSpc>
-              <a:spcAft>
-                <a:spcPts val="950"/>
-              </a:spcAft>
-              <a:buNone/>
-            </a:pPr>
             <a:r>
               <a:rPr lang="en-US" sz="1250" dirty="0">
                 <a:solidFill>
@@ -7057,7 +6612,7 @@
             <a:endParaRPr lang="en-US" sz="1250" dirty="0"/>
           </a:p>
           <a:p>
-            <a:pPr algn="l" indent="0" marL="0">
+            <a:pPr marL="0" indent="0" algn="l">
               <a:lnSpc>
                 <a:spcPct val="123000"/>
               </a:lnSpc>
@@ -7074,12 +6629,6 @@
               </a:rPr>
               <a:t>Например, ошибка может возникать только при </a:t>
             </a:r>
-            <a:pPr algn="l" indent="0" marL="0">
-              <a:lnSpc>
-                <a:spcPct val="123000"/>
-              </a:lnSpc>
-              <a:buNone/>
-            </a:pPr>
             <a:r>
               <a:rPr lang="en-US" sz="1250" b="1" dirty="0">
                 <a:solidFill>
@@ -7091,12 +6640,6 @@
               </a:rPr>
               <a:t>Chrome + Windows + администратор</a:t>
             </a:r>
-            <a:pPr algn="l" indent="0" marL="0">
-              <a:lnSpc>
-                <a:spcPct val="123000"/>
-              </a:lnSpc>
-              <a:buNone/>
-            </a:pPr>
             <a:r>
               <a:rPr lang="en-US" sz="1250" dirty="0">
                 <a:solidFill>
@@ -7162,7 +6705,7 @@
           </a:bodyPr>
           <a:lstStyle/>
           <a:p>
-            <a:pPr algn="l" indent="0" marL="0">
+            <a:pPr marL="0" indent="0" algn="l">
               <a:lnSpc>
                 <a:spcPct val="104000"/>
               </a:lnSpc>
@@ -7206,7 +6749,7 @@
           </a:bodyPr>
           <a:lstStyle/>
           <a:p>
-            <a:pPr algn="l" indent="0" marL="0">
+            <a:pPr marL="0" indent="0" algn="l">
               <a:lnSpc>
                 <a:spcPct val="123000"/>
               </a:lnSpc>
@@ -7223,12 +6766,6 @@
               </a:rPr>
               <a:t>Дополнительно включать </a:t>
             </a:r>
-            <a:pPr algn="l" indent="0" marL="0">
-              <a:lnSpc>
-                <a:spcPct val="123000"/>
-              </a:lnSpc>
-              <a:buNone/>
-            </a:pPr>
             <a:r>
               <a:rPr lang="en-US" sz="1250" b="1" dirty="0">
                 <a:solidFill>
@@ -7240,12 +6777,6 @@
               </a:rPr>
               <a:t>известные рискованные комбинации</a:t>
             </a:r>
-            <a:pPr algn="l" indent="0" marL="0">
-              <a:lnSpc>
-                <a:spcPct val="123000"/>
-              </a:lnSpc>
-              <a:buNone/>
-            </a:pPr>
             <a:r>
               <a:rPr lang="en-US" sz="1250" dirty="0">
                 <a:solidFill>
@@ -7309,7 +6840,7 @@
           <a:bodyPr wrap="none" lIns="0" tIns="0" rIns="0" bIns="0" rtlCol="0" anchor="t"/>
           <a:lstStyle/>
           <a:p>
-            <a:pPr algn="l" indent="0" marL="0">
+            <a:pPr marL="0" indent="0" algn="l">
               <a:lnSpc>
                 <a:spcPct val="104000"/>
               </a:lnSpc>
@@ -7353,7 +6884,7 @@
           </a:bodyPr>
           <a:lstStyle/>
           <a:p>
-            <a:pPr algn="l" indent="0" marL="0">
+            <a:pPr marL="0" indent="0" algn="l">
               <a:lnSpc>
                 <a:spcPct val="123000"/>
               </a:lnSpc>
@@ -7370,12 +6901,6 @@
               </a:rPr>
               <a:t>Применять более сильное </a:t>
             </a:r>
-            <a:pPr algn="l" indent="0" marL="0">
-              <a:lnSpc>
-                <a:spcPct val="123000"/>
-              </a:lnSpc>
-              <a:buNone/>
-            </a:pPr>
             <a:r>
               <a:rPr lang="en-US" sz="1250" b="1" dirty="0">
                 <a:solidFill>
@@ -7387,12 +6912,6 @@
               </a:rPr>
               <a:t>комбинаторное покрытие</a:t>
             </a:r>
-            <a:pPr algn="l" indent="0" marL="0">
-              <a:lnSpc>
-                <a:spcPct val="123000"/>
-              </a:lnSpc>
-              <a:buNone/>
-            </a:pPr>
             <a:r>
               <a:rPr lang="en-US" sz="1250" dirty="0">
                 <a:solidFill>
@@ -7709,4 +7228,299 @@
     </a:ext>
   </a:extLst>
 </a:theme>
+</file>
+
+<file path=ppt/theme/theme2.xml><?xml version="1.0" encoding="utf-8"?>
+<a:theme xmlns:a="http://schemas.openxmlformats.org/drawingml/2006/main" name="Тема Office">
+  <a:themeElements>
+    <a:clrScheme name="Стандартная">
+      <a:dk1>
+        <a:sysClr val="windowText" lastClr="000000"/>
+      </a:dk1>
+      <a:lt1>
+        <a:sysClr val="window" lastClr="FFFFFF"/>
+      </a:lt1>
+      <a:dk2>
+        <a:srgbClr val="44546A"/>
+      </a:dk2>
+      <a:lt2>
+        <a:srgbClr val="E7E6E6"/>
+      </a:lt2>
+      <a:accent1>
+        <a:srgbClr val="4472C4"/>
+      </a:accent1>
+      <a:accent2>
+        <a:srgbClr val="ED7D31"/>
+      </a:accent2>
+      <a:accent3>
+        <a:srgbClr val="A5A5A5"/>
+      </a:accent3>
+      <a:accent4>
+        <a:srgbClr val="FFC000"/>
+      </a:accent4>
+      <a:accent5>
+        <a:srgbClr val="5B9BD5"/>
+      </a:accent5>
+      <a:accent6>
+        <a:srgbClr val="70AD47"/>
+      </a:accent6>
+      <a:hlink>
+        <a:srgbClr val="0563C1"/>
+      </a:hlink>
+      <a:folHlink>
+        <a:srgbClr val="954F72"/>
+      </a:folHlink>
+    </a:clrScheme>
+    <a:fontScheme name="Стандартная">
+      <a:majorFont>
+        <a:latin typeface="Calibri Light" panose="020F0302020204030204"/>
+        <a:ea typeface=""/>
+        <a:cs typeface=""/>
+        <a:font script="Jpan" typeface="游ゴシック Light"/>
+        <a:font script="Hang" typeface="맑은 고딕"/>
+        <a:font script="Hans" typeface="等线 Light"/>
+        <a:font script="Hant" typeface="新細明體"/>
+        <a:font script="Arab" typeface="Times New Roman"/>
+        <a:font script="Hebr" typeface="Times New Roman"/>
+        <a:font script="Thai" typeface="Angsana New"/>
+        <a:font script="Ethi" typeface="Nyala"/>
+        <a:font script="Beng" typeface="Vrinda"/>
+        <a:font script="Gujr" typeface="Shruti"/>
+        <a:font script="Khmr" typeface="MoolBoran"/>
+        <a:font script="Knda" typeface="Tunga"/>
+        <a:font script="Guru" typeface="Raavi"/>
+        <a:font script="Cans" typeface="Euphemia"/>
+        <a:font script="Cher" typeface="Plantagenet Cherokee"/>
+        <a:font script="Yiii" typeface="Microsoft Yi Baiti"/>
+        <a:font script="Tibt" typeface="Microsoft Himalaya"/>
+        <a:font script="Thaa" typeface="MV Boli"/>
+        <a:font script="Deva" typeface="Mangal"/>
+        <a:font script="Telu" typeface="Gautami"/>
+        <a:font script="Taml" typeface="Latha"/>
+        <a:font script="Syrc" typeface="Estrangelo Edessa"/>
+        <a:font script="Orya" typeface="Kalinga"/>
+        <a:font script="Mlym" typeface="Kartika"/>
+        <a:font script="Laoo" typeface="DokChampa"/>
+        <a:font script="Sinh" typeface="Iskoola Pota"/>
+        <a:font script="Mong" typeface="Mongolian Baiti"/>
+        <a:font script="Viet" typeface="Times New Roman"/>
+        <a:font script="Uigh" typeface="Microsoft Uighur"/>
+        <a:font script="Geor" typeface="Sylfaen"/>
+        <a:font script="Armn" typeface="Arial"/>
+        <a:font script="Bugi" typeface="Leelawadee UI"/>
+        <a:font script="Bopo" typeface="Microsoft JhengHei"/>
+        <a:font script="Java" typeface="Javanese Text"/>
+        <a:font script="Lisu" typeface="Segoe UI"/>
+        <a:font script="Mymr" typeface="Myanmar Text"/>
+        <a:font script="Nkoo" typeface="Ebrima"/>
+        <a:font script="Olck" typeface="Nirmala UI"/>
+        <a:font script="Osma" typeface="Ebrima"/>
+        <a:font script="Phag" typeface="Phagspa"/>
+        <a:font script="Syrn" typeface="Estrangelo Edessa"/>
+        <a:font script="Syrj" typeface="Estrangelo Edessa"/>
+        <a:font script="Syre" typeface="Estrangelo Edessa"/>
+        <a:font script="Sora" typeface="Nirmala UI"/>
+        <a:font script="Tale" typeface="Microsoft Tai Le"/>
+        <a:font script="Talu" typeface="Microsoft New Tai Lue"/>
+        <a:font script="Tfng" typeface="Ebrima"/>
+      </a:majorFont>
+      <a:minorFont>
+        <a:latin typeface="Calibri" panose="020F0502020204030204"/>
+        <a:ea typeface=""/>
+        <a:cs typeface=""/>
+        <a:font script="Jpan" typeface="游ゴシック"/>
+        <a:font script="Hang" typeface="맑은 고딕"/>
+        <a:font script="Hans" typeface="等线"/>
+        <a:font script="Hant" typeface="新細明體"/>
+        <a:font script="Arab" typeface="Arial"/>
+        <a:font script="Hebr" typeface="Arial"/>
+        <a:font script="Thai" typeface="Cordia New"/>
+        <a:font script="Ethi" typeface="Nyala"/>
+        <a:font script="Beng" typeface="Vrinda"/>
+        <a:font script="Gujr" typeface="Shruti"/>
+        <a:font script="Khmr" typeface="DaunPenh"/>
+        <a:font script="Knda" typeface="Tunga"/>
+        <a:font script="Guru" typeface="Raavi"/>
+        <a:font script="Cans" typeface="Euphemia"/>
+        <a:font script="Cher" typeface="Plantagenet Cherokee"/>
+        <a:font script="Yiii" typeface="Microsoft Yi Baiti"/>
+        <a:font script="Tibt" typeface="Microsoft Himalaya"/>
+        <a:font script="Thaa" typeface="MV Boli"/>
+        <a:font script="Deva" typeface="Mangal"/>
+        <a:font script="Telu" typeface="Gautami"/>
+        <a:font script="Taml" typeface="Latha"/>
+        <a:font script="Syrc" typeface="Estrangelo Edessa"/>
+        <a:font script="Orya" typeface="Kalinga"/>
+        <a:font script="Mlym" typeface="Kartika"/>
+        <a:font script="Laoo" typeface="DokChampa"/>
+        <a:font script="Sinh" typeface="Iskoola Pota"/>
+        <a:font script="Mong" typeface="Mongolian Baiti"/>
+        <a:font script="Viet" typeface="Arial"/>
+        <a:font script="Uigh" typeface="Microsoft Uighur"/>
+        <a:font script="Geor" typeface="Sylfaen"/>
+        <a:font script="Armn" typeface="Arial"/>
+        <a:font script="Bugi" typeface="Leelawadee UI"/>
+        <a:font script="Bopo" typeface="Microsoft JhengHei"/>
+        <a:font script="Java" typeface="Javanese Text"/>
+        <a:font script="Lisu" typeface="Segoe UI"/>
+        <a:font script="Mymr" typeface="Myanmar Text"/>
+        <a:font script="Nkoo" typeface="Ebrima"/>
+        <a:font script="Olck" typeface="Nirmala UI"/>
+        <a:font script="Osma" typeface="Ebrima"/>
+        <a:font script="Phag" typeface="Phagspa"/>
+        <a:font script="Syrn" typeface="Estrangelo Edessa"/>
+        <a:font script="Syrj" typeface="Estrangelo Edessa"/>
+        <a:font script="Syre" typeface="Estrangelo Edessa"/>
+        <a:font script="Sora" typeface="Nirmala UI"/>
+        <a:font script="Tale" typeface="Microsoft Tai Le"/>
+        <a:font script="Talu" typeface="Microsoft New Tai Lue"/>
+        <a:font script="Tfng" typeface="Ebrima"/>
+      </a:minorFont>
+    </a:fontScheme>
+    <a:fmtScheme name="Стандартная">
+      <a:fillStyleLst>
+        <a:solidFill>
+          <a:schemeClr val="phClr"/>
+        </a:solidFill>
+        <a:gradFill rotWithShape="1">
+          <a:gsLst>
+            <a:gs pos="0">
+              <a:schemeClr val="phClr">
+                <a:lumMod val="110000"/>
+                <a:satMod val="105000"/>
+                <a:tint val="67000"/>
+              </a:schemeClr>
+            </a:gs>
+            <a:gs pos="50000">
+              <a:schemeClr val="phClr">
+                <a:lumMod val="105000"/>
+                <a:satMod val="103000"/>
+                <a:tint val="73000"/>
+              </a:schemeClr>
+            </a:gs>
+            <a:gs pos="100000">
+              <a:schemeClr val="phClr">
+                <a:lumMod val="105000"/>
+                <a:satMod val="109000"/>
+                <a:tint val="81000"/>
+              </a:schemeClr>
+            </a:gs>
+          </a:gsLst>
+          <a:lin ang="5400000" scaled="0"/>
+        </a:gradFill>
+        <a:gradFill rotWithShape="1">
+          <a:gsLst>
+            <a:gs pos="0">
+              <a:schemeClr val="phClr">
+                <a:satMod val="103000"/>
+                <a:lumMod val="102000"/>
+                <a:tint val="94000"/>
+              </a:schemeClr>
+            </a:gs>
+            <a:gs pos="50000">
+              <a:schemeClr val="phClr">
+                <a:satMod val="110000"/>
+                <a:lumMod val="100000"/>
+                <a:shade val="100000"/>
+              </a:schemeClr>
+            </a:gs>
+            <a:gs pos="100000">
+              <a:schemeClr val="phClr">
+                <a:lumMod val="99000"/>
+                <a:satMod val="120000"/>
+                <a:shade val="78000"/>
+              </a:schemeClr>
+            </a:gs>
+          </a:gsLst>
+          <a:lin ang="5400000" scaled="0"/>
+        </a:gradFill>
+      </a:fillStyleLst>
+      <a:lnStyleLst>
+        <a:ln w="6350" cap="flat" cmpd="sng" algn="ctr">
+          <a:solidFill>
+            <a:schemeClr val="phClr"/>
+          </a:solidFill>
+          <a:prstDash val="solid"/>
+          <a:miter lim="800000"/>
+        </a:ln>
+        <a:ln w="12700" cap="flat" cmpd="sng" algn="ctr">
+          <a:solidFill>
+            <a:schemeClr val="phClr"/>
+          </a:solidFill>
+          <a:prstDash val="solid"/>
+          <a:miter lim="800000"/>
+        </a:ln>
+        <a:ln w="19050" cap="flat" cmpd="sng" algn="ctr">
+          <a:solidFill>
+            <a:schemeClr val="phClr"/>
+          </a:solidFill>
+          <a:prstDash val="solid"/>
+          <a:miter lim="800000"/>
+        </a:ln>
+      </a:lnStyleLst>
+      <a:effectStyleLst>
+        <a:effectStyle>
+          <a:effectLst/>
+        </a:effectStyle>
+        <a:effectStyle>
+          <a:effectLst/>
+        </a:effectStyle>
+        <a:effectStyle>
+          <a:effectLst>
+            <a:outerShdw blurRad="57150" dist="19050" dir="5400000" algn="ctr" rotWithShape="0">
+              <a:srgbClr val="000000">
+                <a:alpha val="63000"/>
+              </a:srgbClr>
+            </a:outerShdw>
+          </a:effectLst>
+        </a:effectStyle>
+      </a:effectStyleLst>
+      <a:bgFillStyleLst>
+        <a:solidFill>
+          <a:schemeClr val="phClr"/>
+        </a:solidFill>
+        <a:solidFill>
+          <a:schemeClr val="phClr">
+            <a:tint val="95000"/>
+            <a:satMod val="170000"/>
+          </a:schemeClr>
+        </a:solidFill>
+        <a:gradFill rotWithShape="1">
+          <a:gsLst>
+            <a:gs pos="0">
+              <a:schemeClr val="phClr">
+                <a:tint val="93000"/>
+                <a:satMod val="150000"/>
+                <a:shade val="98000"/>
+                <a:lumMod val="102000"/>
+              </a:schemeClr>
+            </a:gs>
+            <a:gs pos="50000">
+              <a:schemeClr val="phClr">
+                <a:tint val="98000"/>
+                <a:satMod val="130000"/>
+                <a:shade val="90000"/>
+                <a:lumMod val="103000"/>
+              </a:schemeClr>
+            </a:gs>
+            <a:gs pos="100000">
+              <a:schemeClr val="phClr">
+                <a:shade val="63000"/>
+                <a:satMod val="120000"/>
+              </a:schemeClr>
+            </a:gs>
+          </a:gsLst>
+          <a:lin ang="5400000" scaled="0"/>
+        </a:gradFill>
+      </a:bgFillStyleLst>
+    </a:fmtScheme>
+  </a:themeElements>
+  <a:objectDefaults/>
+  <a:extraClrSchemeLst/>
+  <a:extLst>
+    <a:ext uri="{05A4C25C-085E-4340-85A3-A5531E510DB2}">
+      <thm15:themeFamily xmlns:thm15="http://schemas.microsoft.com/office/thememl/2012/main" name="Office Theme" id="{62F939B6-93AF-4DB8-9C6B-D6C7DFDC589F}" vid="{4A3C46E8-61CC-4603-A589-7422A47A8E4A}"/>
+    </a:ext>
+  </a:extLst>
+</a:theme>
 </file>